--- a/semaine_04/420905_semaine4.pptx
+++ b/semaine_04/420905_semaine4.pptx
@@ -38,15 +38,6 @@
     <p:sldId id="325" r:id="rId32"/>
     <p:sldId id="324" r:id="rId33"/>
     <p:sldId id="330" r:id="rId34"/>
-    <p:sldId id="331" r:id="rId35"/>
-    <p:sldId id="332" r:id="rId36"/>
-    <p:sldId id="333" r:id="rId37"/>
-    <p:sldId id="334" r:id="rId38"/>
-    <p:sldId id="335" r:id="rId39"/>
-    <p:sldId id="339" r:id="rId40"/>
-    <p:sldId id="336" r:id="rId41"/>
-    <p:sldId id="337" r:id="rId42"/>
-    <p:sldId id="338" r:id="rId43"/>
   </p:sldIdLst>
   <p:sldSz cx="12192000" cy="6858000"/>
   <p:notesSz cx="6858000" cy="9144000"/>
@@ -1841,7 +1832,7 @@
           <a:p>
             <a:fld id="{CFA36C02-C10D-4F70-ADA5-0F3523AD6F2E}" type="datetimeFigureOut">
               <a:rPr lang="fr-CA" smtClean="0"/>
-              <a:t>2022-09-07</a:t>
+              <a:t>2022-09-10</a:t>
             </a:fld>
             <a:endParaRPr lang="fr-CA" dirty="0"/>
           </a:p>
@@ -12283,33 +12274,34 @@
           <a:p>
             <a:pPr lvl="1"/>
             <a:r>
-              <a:rPr lang="fr-CA" dirty="0"/>
-              <a:t>  La </a:t>
-            </a:r>
-            <a:r>
-              <a:rPr lang="fr-CA" dirty="0">
+              <a:rPr lang="fr-CA"/>
+              <a:t>  </a:t>
+            </a:r>
+            <a:r>
+              <a:rPr lang="fr-CA">
                 <a:solidFill>
                   <a:srgbClr val="FA4098"/>
                 </a:solidFill>
               </a:rPr>
+              <a:t>Visual Studio Code</a:t>
+            </a:r>
+            <a:r>
+              <a:rPr lang="fr-CA"/>
+              <a:t> dispose d’outils de débogage. Toutefois, pour le moment, nous allons apprendre à déboguer avec l’aide de la </a:t>
+            </a:r>
+            <a:r>
+              <a:rPr lang="fr-CA">
+                <a:solidFill>
+                  <a:srgbClr val="FA4098"/>
+                </a:solidFill>
+              </a:rPr>
               <a:t>console</a:t>
             </a:r>
             <a:r>
-              <a:rPr lang="fr-CA" dirty="0"/>
-              <a:t> du navigateur et </a:t>
-            </a:r>
-            <a:r>
-              <a:rPr lang="fr-CA" dirty="0">
-                <a:solidFill>
-                  <a:srgbClr val="FA4098"/>
-                </a:solidFill>
-              </a:rPr>
-              <a:t>Visual Studio Code</a:t>
-            </a:r>
-            <a:r>
-              <a:rPr lang="fr-CA" dirty="0"/>
-              <a:t> nous aideront à « déboguer » tel qu’expliqué dans les prochaines diapositives.</a:t>
-            </a:r>
+              <a:rPr lang="fr-CA"/>
+              <a:t> du navigateur.</a:t>
+            </a:r>
+            <a:endParaRPr lang="fr-CA" dirty="0"/>
           </a:p>
         </p:txBody>
       </p:sp>
@@ -12341,42 +12333,6 @@
           </a:p>
         </p:txBody>
       </p:sp>
-      <p:pic>
-        <p:nvPicPr>
-          <p:cNvPr id="7" name="Image 6">
-            <a:extLst>
-              <a:ext uri="{FF2B5EF4-FFF2-40B4-BE49-F238E27FC236}">
-                <a16:creationId xmlns:a16="http://schemas.microsoft.com/office/drawing/2014/main" id="{32D84E12-0861-42DF-ADB8-2A972C174808}"/>
-              </a:ext>
-            </a:extLst>
-          </p:cNvPr>
-          <p:cNvPicPr>
-            <a:picLocks noChangeAspect="1"/>
-          </p:cNvPicPr>
-          <p:nvPr/>
-        </p:nvPicPr>
-        <p:blipFill>
-          <a:blip r:embed="rId2">
-            <a:extLst>
-              <a:ext uri="{28A0092B-C50C-407E-A947-70E740481C1C}">
-                <a14:useLocalDpi xmlns:a14="http://schemas.microsoft.com/office/drawing/2010/main" val="0"/>
-              </a:ext>
-            </a:extLst>
-          </a:blip>
-          <a:stretch>
-            <a:fillRect/>
-          </a:stretch>
-        </p:blipFill>
-        <p:spPr>
-          <a:xfrm>
-            <a:off x="7068550" y="3804142"/>
-            <a:ext cx="1176290" cy="1176290"/>
-          </a:xfrm>
-          <a:prstGeom prst="rect">
-            <a:avLst/>
-          </a:prstGeom>
-        </p:spPr>
-      </p:pic>
       <p:sp>
         <p:nvSpPr>
           <p:cNvPr id="8" name="ZoneTexte 7">
@@ -12391,7 +12347,7 @@
         </p:nvSpPr>
         <p:spPr>
           <a:xfrm>
-            <a:off x="5769625" y="5153833"/>
+            <a:off x="7250953" y="4015060"/>
             <a:ext cx="939022" cy="769441"/>
           </a:xfrm>
           <a:prstGeom prst="rect">
@@ -12421,124 +12377,6 @@
           </a:p>
         </p:txBody>
       </p:sp>
-      <p:sp>
-        <p:nvSpPr>
-          <p:cNvPr id="9" name="ZoneTexte 8">
-            <a:extLst>
-              <a:ext uri="{FF2B5EF4-FFF2-40B4-BE49-F238E27FC236}">
-                <a16:creationId xmlns:a16="http://schemas.microsoft.com/office/drawing/2014/main" id="{95C8CBB0-A141-4087-92E3-9E13990B88DA}"/>
-              </a:ext>
-            </a:extLst>
-          </p:cNvPr>
-          <p:cNvSpPr txBox="1"/>
-          <p:nvPr/>
-        </p:nvSpPr>
-        <p:spPr>
-          <a:xfrm>
-            <a:off x="7705820" y="4753094"/>
-            <a:ext cx="1176290" cy="369332"/>
-          </a:xfrm>
-          <a:prstGeom prst="rect">
-            <a:avLst/>
-          </a:prstGeom>
-          <a:noFill/>
-        </p:spPr>
-        <p:txBody>
-          <a:bodyPr wrap="square" rtlCol="0">
-            <a:spAutoFit/>
-          </a:bodyPr>
-          <a:lstStyle/>
-          <a:p>
-            <a:r>
-              <a:rPr lang="en-CA" dirty="0"/>
-              <a:t>😠💣</a:t>
-            </a:r>
-            <a:endParaRPr lang="fr-CA" dirty="0"/>
-          </a:p>
-        </p:txBody>
-      </p:sp>
-      <p:sp>
-        <p:nvSpPr>
-          <p:cNvPr id="10" name="ZoneTexte 9">
-            <a:extLst>
-              <a:ext uri="{FF2B5EF4-FFF2-40B4-BE49-F238E27FC236}">
-                <a16:creationId xmlns:a16="http://schemas.microsoft.com/office/drawing/2014/main" id="{9F120902-AC56-4090-9F97-BD06FD581642}"/>
-              </a:ext>
-            </a:extLst>
-          </p:cNvPr>
-          <p:cNvSpPr txBox="1"/>
-          <p:nvPr/>
-        </p:nvSpPr>
-        <p:spPr>
-          <a:xfrm>
-            <a:off x="3886259" y="4810540"/>
-            <a:ext cx="1993392" cy="369332"/>
-          </a:xfrm>
-          <a:prstGeom prst="rect">
-            <a:avLst/>
-          </a:prstGeom>
-          <a:noFill/>
-        </p:spPr>
-        <p:txBody>
-          <a:bodyPr wrap="square" rtlCol="0">
-            <a:spAutoFit/>
-          </a:bodyPr>
-          <a:lstStyle/>
-          <a:p>
-            <a:r>
-              <a:rPr lang="en-CA" dirty="0"/>
-              <a:t>😠🔪</a:t>
-            </a:r>
-            <a:endParaRPr lang="fr-CA" dirty="0"/>
-          </a:p>
-        </p:txBody>
-      </p:sp>
-      <p:cxnSp>
-        <p:nvCxnSpPr>
-          <p:cNvPr id="13" name="Connecteur droit avec flèche 12">
-            <a:extLst>
-              <a:ext uri="{FF2B5EF4-FFF2-40B4-BE49-F238E27FC236}">
-                <a16:creationId xmlns:a16="http://schemas.microsoft.com/office/drawing/2014/main" id="{C3E16D56-5D2E-4162-9F45-FD2C7BE253A9}"/>
-              </a:ext>
-            </a:extLst>
-          </p:cNvPr>
-          <p:cNvCxnSpPr>
-            <a:cxnSpLocks/>
-            <a:stCxn id="7" idx="2"/>
-            <a:endCxn id="8" idx="3"/>
-          </p:cNvCxnSpPr>
-          <p:nvPr/>
-        </p:nvCxnSpPr>
-        <p:spPr>
-          <a:xfrm flipH="1">
-            <a:off x="6708647" y="4980432"/>
-            <a:ext cx="948048" cy="558122"/>
-          </a:xfrm>
-          <a:prstGeom prst="straightConnector1">
-            <a:avLst/>
-          </a:prstGeom>
-          <a:ln w="76200">
-            <a:solidFill>
-              <a:srgbClr val="B177BF"/>
-            </a:solidFill>
-            <a:tailEnd type="triangle"/>
-          </a:ln>
-        </p:spPr>
-        <p:style>
-          <a:lnRef idx="1">
-            <a:schemeClr val="accent1"/>
-          </a:lnRef>
-          <a:fillRef idx="0">
-            <a:schemeClr val="accent1"/>
-          </a:fillRef>
-          <a:effectRef idx="0">
-            <a:schemeClr val="accent1"/>
-          </a:effectRef>
-          <a:fontRef idx="minor">
-            <a:schemeClr val="tx1"/>
-          </a:fontRef>
-        </p:style>
-      </p:cxnSp>
       <p:cxnSp>
         <p:nvCxnSpPr>
           <p:cNvPr id="16" name="Connecteur droit avec flèche 15">
@@ -12556,8 +12394,8 @@
         </p:nvCxnSpPr>
         <p:spPr>
           <a:xfrm>
-            <a:off x="4882955" y="5047488"/>
-            <a:ext cx="886670" cy="491066"/>
+            <a:off x="5235297" y="4399780"/>
+            <a:ext cx="2015656" cy="1"/>
           </a:xfrm>
           <a:prstGeom prst="straightConnector1">
             <a:avLst/>
@@ -12599,14 +12437,14 @@
           <p:nvPr/>
         </p:nvPicPr>
         <p:blipFill>
-          <a:blip r:embed="rId3"/>
+          <a:blip r:embed="rId2"/>
           <a:stretch>
             <a:fillRect/>
           </a:stretch>
         </p:blipFill>
         <p:spPr>
           <a:xfrm>
-            <a:off x="3368269" y="4200567"/>
+            <a:off x="3538932" y="4015060"/>
             <a:ext cx="1514686" cy="552527"/>
           </a:xfrm>
           <a:prstGeom prst="rect">
@@ -12614,6 +12452,42 @@
           </a:prstGeom>
         </p:spPr>
       </p:pic>
+      <p:sp>
+        <p:nvSpPr>
+          <p:cNvPr id="10" name="ZoneTexte 9">
+            <a:extLst>
+              <a:ext uri="{FF2B5EF4-FFF2-40B4-BE49-F238E27FC236}">
+                <a16:creationId xmlns:a16="http://schemas.microsoft.com/office/drawing/2014/main" id="{9F120902-AC56-4090-9F97-BD06FD581642}"/>
+              </a:ext>
+            </a:extLst>
+          </p:cNvPr>
+          <p:cNvSpPr txBox="1"/>
+          <p:nvPr/>
+        </p:nvSpPr>
+        <p:spPr>
+          <a:xfrm>
+            <a:off x="4500435" y="4390615"/>
+            <a:ext cx="1106365" cy="369332"/>
+          </a:xfrm>
+          <a:prstGeom prst="rect">
+            <a:avLst/>
+          </a:prstGeom>
+          <a:noFill/>
+        </p:spPr>
+        <p:txBody>
+          <a:bodyPr wrap="square" rtlCol="0">
+            <a:spAutoFit/>
+          </a:bodyPr>
+          <a:lstStyle/>
+          <a:p>
+            <a:r>
+              <a:rPr lang="en-CA"/>
+              <a:t>😠💣</a:t>
+            </a:r>
+            <a:endParaRPr lang="fr-CA"/>
+          </a:p>
+        </p:txBody>
+      </p:sp>
     </p:spTree>
     <p:extLst>
       <p:ext uri="{BB962C8B-B14F-4D97-AF65-F5344CB8AC3E}">
@@ -14575,1628 +14449,6 @@
 </p:sld>
 </file>
 
-<file path=ppt/slides/slide34.xml><?xml version="1.0" encoding="utf-8"?>
-<p:sld xmlns:a="http://schemas.openxmlformats.org/drawingml/2006/main" xmlns:r="http://schemas.openxmlformats.org/officeDocument/2006/relationships" xmlns:p="http://schemas.openxmlformats.org/presentationml/2006/main">
-  <p:cSld>
-    <p:spTree>
-      <p:nvGrpSpPr>
-        <p:cNvPr id="1" name=""/>
-        <p:cNvGrpSpPr/>
-        <p:nvPr/>
-      </p:nvGrpSpPr>
-      <p:grpSpPr>
-        <a:xfrm>
-          <a:off x="0" y="0"/>
-          <a:ext cx="0" cy="0"/>
-          <a:chOff x="0" y="0"/>
-          <a:chExt cx="0" cy="0"/>
-        </a:xfrm>
-      </p:grpSpPr>
-      <p:sp>
-        <p:nvSpPr>
-          <p:cNvPr id="2" name="Espace réservé du contenu 1">
-            <a:extLst>
-              <a:ext uri="{FF2B5EF4-FFF2-40B4-BE49-F238E27FC236}">
-                <a16:creationId xmlns:a16="http://schemas.microsoft.com/office/drawing/2014/main" id="{D175B3B4-CDD9-482F-AD6E-26EEB3AD0D65}"/>
-              </a:ext>
-            </a:extLst>
-          </p:cNvPr>
-          <p:cNvSpPr>
-            <a:spLocks noGrp="1"/>
-          </p:cNvSpPr>
-          <p:nvPr>
-            <p:ph idx="1"/>
-          </p:nvPr>
-        </p:nvSpPr>
-        <p:spPr/>
-        <p:txBody>
-          <a:bodyPr/>
-          <a:lstStyle/>
-          <a:p>
-            <a:r>
-              <a:rPr lang="fr-CA" dirty="0"/>
-              <a:t> Débogage avec VS Code</a:t>
-            </a:r>
-          </a:p>
-          <a:p>
-            <a:pPr lvl="1"/>
-            <a:r>
-              <a:rPr lang="fr-CA" dirty="0"/>
-              <a:t> Mieux adapté pour tester des fonctions plus longues ou complexes</a:t>
-            </a:r>
-          </a:p>
-          <a:p>
-            <a:pPr lvl="2"/>
-            <a:r>
-              <a:rPr lang="fr-CA" dirty="0"/>
-              <a:t> Exemple : Tester la fonction </a:t>
-            </a:r>
-            <a:r>
-              <a:rPr lang="fr-CA" b="1" dirty="0">
-                <a:solidFill>
-                  <a:schemeClr val="tx1"/>
-                </a:solidFill>
-                <a:latin typeface="Courier New" panose="02070309020205020404" pitchFamily="49" charset="0"/>
-                <a:cs typeface="Courier New" panose="02070309020205020404" pitchFamily="49" charset="0"/>
-              </a:rPr>
-              <a:t>saluer()</a:t>
-            </a:r>
-            <a:r>
-              <a:rPr lang="fr-CA" dirty="0"/>
-              <a:t>, qui permet de faire une </a:t>
-            </a:r>
-            <a:r>
-              <a:rPr lang="fr-CA" b="1" dirty="0"/>
-              <a:t>alerte</a:t>
-            </a:r>
-            <a:r>
-              <a:rPr lang="fr-CA" dirty="0"/>
-              <a:t> « Bonsoir » si </a:t>
-            </a:r>
-            <a:r>
-              <a:rPr lang="fr-CA" b="1" dirty="0">
-                <a:solidFill>
-                  <a:schemeClr val="tx1"/>
-                </a:solidFill>
-                <a:latin typeface="Courier New" panose="02070309020205020404" pitchFamily="49" charset="0"/>
-                <a:cs typeface="Courier New" panose="02070309020205020404" pitchFamily="49" charset="0"/>
-              </a:rPr>
-              <a:t>gTemps</a:t>
-            </a:r>
-            <a:r>
-              <a:rPr lang="fr-CA" dirty="0">
-                <a:cs typeface="Courier New" panose="02070309020205020404" pitchFamily="49" charset="0"/>
-              </a:rPr>
-              <a:t> </a:t>
-            </a:r>
-            <a:r>
-              <a:rPr lang="fr-CA" dirty="0"/>
-              <a:t>vaut "soir" ou une alerte « Bonjour » sinon.</a:t>
-            </a:r>
-          </a:p>
-        </p:txBody>
-      </p:sp>
-      <p:sp>
-        <p:nvSpPr>
-          <p:cNvPr id="3" name="Titre 2">
-            <a:extLst>
-              <a:ext uri="{FF2B5EF4-FFF2-40B4-BE49-F238E27FC236}">
-                <a16:creationId xmlns:a16="http://schemas.microsoft.com/office/drawing/2014/main" id="{08626D7E-0E2B-41DD-A935-9F2BB87645EF}"/>
-              </a:ext>
-            </a:extLst>
-          </p:cNvPr>
-          <p:cNvSpPr>
-            <a:spLocks noGrp="1"/>
-          </p:cNvSpPr>
-          <p:nvPr>
-            <p:ph type="title"/>
-          </p:nvPr>
-        </p:nvSpPr>
-        <p:spPr/>
-        <p:txBody>
-          <a:bodyPr/>
-          <a:lstStyle/>
-          <a:p>
-            <a:r>
-              <a:rPr lang="fr-CA" dirty="0"/>
-              <a:t>Débogage avec VS Code</a:t>
-            </a:r>
-          </a:p>
-        </p:txBody>
-      </p:sp>
-      <p:pic>
-        <p:nvPicPr>
-          <p:cNvPr id="7" name="Image 6">
-            <a:extLst>
-              <a:ext uri="{FF2B5EF4-FFF2-40B4-BE49-F238E27FC236}">
-                <a16:creationId xmlns:a16="http://schemas.microsoft.com/office/drawing/2014/main" id="{6CC7692B-2C97-4CBB-811C-D1A63FA9167F}"/>
-              </a:ext>
-            </a:extLst>
-          </p:cNvPr>
-          <p:cNvPicPr>
-            <a:picLocks noChangeAspect="1"/>
-          </p:cNvPicPr>
-          <p:nvPr/>
-        </p:nvPicPr>
-        <p:blipFill>
-          <a:blip r:embed="rId2"/>
-          <a:stretch>
-            <a:fillRect/>
-          </a:stretch>
-        </p:blipFill>
-        <p:spPr>
-          <a:xfrm>
-            <a:off x="4167864" y="2807208"/>
-            <a:ext cx="4010585" cy="2629267"/>
-          </a:xfrm>
-          <a:prstGeom prst="rect">
-            <a:avLst/>
-          </a:prstGeom>
-          <a:ln w="28575">
-            <a:solidFill>
-              <a:srgbClr val="B177BF"/>
-            </a:solidFill>
-          </a:ln>
-        </p:spPr>
-      </p:pic>
-    </p:spTree>
-    <p:extLst>
-      <p:ext uri="{BB962C8B-B14F-4D97-AF65-F5344CB8AC3E}">
-        <p14:creationId xmlns:p14="http://schemas.microsoft.com/office/powerpoint/2010/main" val="2302941157"/>
-      </p:ext>
-    </p:extLst>
-  </p:cSld>
-  <p:clrMapOvr>
-    <a:masterClrMapping/>
-  </p:clrMapOvr>
-</p:sld>
-</file>
-
-<file path=ppt/slides/slide35.xml><?xml version="1.0" encoding="utf-8"?>
-<p:sld xmlns:a="http://schemas.openxmlformats.org/drawingml/2006/main" xmlns:r="http://schemas.openxmlformats.org/officeDocument/2006/relationships" xmlns:p="http://schemas.openxmlformats.org/presentationml/2006/main">
-  <p:cSld>
-    <p:spTree>
-      <p:nvGrpSpPr>
-        <p:cNvPr id="1" name=""/>
-        <p:cNvGrpSpPr/>
-        <p:nvPr/>
-      </p:nvGrpSpPr>
-      <p:grpSpPr>
-        <a:xfrm>
-          <a:off x="0" y="0"/>
-          <a:ext cx="0" cy="0"/>
-          <a:chOff x="0" y="0"/>
-          <a:chExt cx="0" cy="0"/>
-        </a:xfrm>
-      </p:grpSpPr>
-      <p:sp>
-        <p:nvSpPr>
-          <p:cNvPr id="2" name="Espace réservé du contenu 1">
-            <a:extLst>
-              <a:ext uri="{FF2B5EF4-FFF2-40B4-BE49-F238E27FC236}">
-                <a16:creationId xmlns:a16="http://schemas.microsoft.com/office/drawing/2014/main" id="{D175B3B4-CDD9-482F-AD6E-26EEB3AD0D65}"/>
-              </a:ext>
-            </a:extLst>
-          </p:cNvPr>
-          <p:cNvSpPr>
-            <a:spLocks noGrp="1"/>
-          </p:cNvSpPr>
-          <p:nvPr>
-            <p:ph idx="1"/>
-          </p:nvPr>
-        </p:nvSpPr>
-        <p:spPr/>
-        <p:txBody>
-          <a:bodyPr/>
-          <a:lstStyle/>
-          <a:p>
-            <a:r>
-              <a:rPr lang="fr-CA" dirty="0"/>
-              <a:t> Débogage avec VS Code</a:t>
-            </a:r>
-          </a:p>
-          <a:p>
-            <a:pPr lvl="1"/>
-            <a:r>
-              <a:rPr lang="fr-CA" dirty="0"/>
-              <a:t> </a:t>
-            </a:r>
-            <a:r>
-              <a:rPr lang="fr-CA" dirty="0">
-                <a:solidFill>
-                  <a:srgbClr val="FA4098"/>
-                </a:solidFill>
-              </a:rPr>
-              <a:t>Étape 1</a:t>
-            </a:r>
-            <a:r>
-              <a:rPr lang="fr-CA" dirty="0"/>
-              <a:t> : Je teste ma fonction avec la console (ou avec un bouton s’il y a un écouteur d’événements)</a:t>
-            </a:r>
-          </a:p>
-        </p:txBody>
-      </p:sp>
-      <p:sp>
-        <p:nvSpPr>
-          <p:cNvPr id="3" name="Titre 2">
-            <a:extLst>
-              <a:ext uri="{FF2B5EF4-FFF2-40B4-BE49-F238E27FC236}">
-                <a16:creationId xmlns:a16="http://schemas.microsoft.com/office/drawing/2014/main" id="{08626D7E-0E2B-41DD-A935-9F2BB87645EF}"/>
-              </a:ext>
-            </a:extLst>
-          </p:cNvPr>
-          <p:cNvSpPr>
-            <a:spLocks noGrp="1"/>
-          </p:cNvSpPr>
-          <p:nvPr>
-            <p:ph type="title"/>
-          </p:nvPr>
-        </p:nvSpPr>
-        <p:spPr/>
-        <p:txBody>
-          <a:bodyPr/>
-          <a:lstStyle/>
-          <a:p>
-            <a:r>
-              <a:rPr lang="fr-CA" dirty="0"/>
-              <a:t>Débogage avec VS Code</a:t>
-            </a:r>
-          </a:p>
-        </p:txBody>
-      </p:sp>
-      <p:pic>
-        <p:nvPicPr>
-          <p:cNvPr id="7" name="Image 6">
-            <a:extLst>
-              <a:ext uri="{FF2B5EF4-FFF2-40B4-BE49-F238E27FC236}">
-                <a16:creationId xmlns:a16="http://schemas.microsoft.com/office/drawing/2014/main" id="{6CC7692B-2C97-4CBB-811C-D1A63FA9167F}"/>
-              </a:ext>
-            </a:extLst>
-          </p:cNvPr>
-          <p:cNvPicPr>
-            <a:picLocks noChangeAspect="1"/>
-          </p:cNvPicPr>
-          <p:nvPr/>
-        </p:nvPicPr>
-        <p:blipFill>
-          <a:blip r:embed="rId2"/>
-          <a:stretch>
-            <a:fillRect/>
-          </a:stretch>
-        </p:blipFill>
-        <p:spPr>
-          <a:xfrm>
-            <a:off x="6392904" y="2349134"/>
-            <a:ext cx="4010585" cy="2629267"/>
-          </a:xfrm>
-          <a:prstGeom prst="rect">
-            <a:avLst/>
-          </a:prstGeom>
-          <a:ln w="28575">
-            <a:solidFill>
-              <a:srgbClr val="B177BF"/>
-            </a:solidFill>
-          </a:ln>
-        </p:spPr>
-      </p:pic>
-      <p:sp>
-        <p:nvSpPr>
-          <p:cNvPr id="6" name="ZoneTexte 5">
-            <a:extLst>
-              <a:ext uri="{FF2B5EF4-FFF2-40B4-BE49-F238E27FC236}">
-                <a16:creationId xmlns:a16="http://schemas.microsoft.com/office/drawing/2014/main" id="{429A0EA2-7C54-4A70-8D20-E67BC624AEB2}"/>
-              </a:ext>
-            </a:extLst>
-          </p:cNvPr>
-          <p:cNvSpPr txBox="1"/>
-          <p:nvPr/>
-        </p:nvSpPr>
-        <p:spPr>
-          <a:xfrm>
-            <a:off x="459021" y="4798791"/>
-            <a:ext cx="3395472" cy="369332"/>
-          </a:xfrm>
-          <a:prstGeom prst="rect">
-            <a:avLst/>
-          </a:prstGeom>
-          <a:noFill/>
-        </p:spPr>
-        <p:txBody>
-          <a:bodyPr wrap="square" rtlCol="0">
-            <a:spAutoFit/>
-          </a:bodyPr>
-          <a:lstStyle/>
-          <a:p>
-            <a:r>
-              <a:rPr lang="fr-CA" dirty="0">
-                <a:solidFill>
-                  <a:srgbClr val="B177BF"/>
-                </a:solidFill>
-              </a:rPr>
-              <a:t>Résultat : </a:t>
-            </a:r>
-          </a:p>
-        </p:txBody>
-      </p:sp>
-      <p:pic>
-        <p:nvPicPr>
-          <p:cNvPr id="9" name="Image 8">
-            <a:extLst>
-              <a:ext uri="{FF2B5EF4-FFF2-40B4-BE49-F238E27FC236}">
-                <a16:creationId xmlns:a16="http://schemas.microsoft.com/office/drawing/2014/main" id="{25189C35-9205-4615-B360-E39544FC4E94}"/>
-              </a:ext>
-            </a:extLst>
-          </p:cNvPr>
-          <p:cNvPicPr>
-            <a:picLocks noChangeAspect="1"/>
-          </p:cNvPicPr>
-          <p:nvPr/>
-        </p:nvPicPr>
-        <p:blipFill>
-          <a:blip r:embed="rId3"/>
-          <a:stretch>
-            <a:fillRect/>
-          </a:stretch>
-        </p:blipFill>
-        <p:spPr>
-          <a:xfrm>
-            <a:off x="459021" y="5168123"/>
-            <a:ext cx="4086795" cy="1428949"/>
-          </a:xfrm>
-          <a:prstGeom prst="rect">
-            <a:avLst/>
-          </a:prstGeom>
-          <a:ln w="28575">
-            <a:solidFill>
-              <a:srgbClr val="B177BF"/>
-            </a:solidFill>
-          </a:ln>
-        </p:spPr>
-      </p:pic>
-      <p:pic>
-        <p:nvPicPr>
-          <p:cNvPr id="11" name="Image 10">
-            <a:extLst>
-              <a:ext uri="{FF2B5EF4-FFF2-40B4-BE49-F238E27FC236}">
-                <a16:creationId xmlns:a16="http://schemas.microsoft.com/office/drawing/2014/main" id="{11435190-C250-46D2-9D82-EA8546E66C20}"/>
-              </a:ext>
-            </a:extLst>
-          </p:cNvPr>
-          <p:cNvPicPr>
-            <a:picLocks noChangeAspect="1"/>
-          </p:cNvPicPr>
-          <p:nvPr/>
-        </p:nvPicPr>
-        <p:blipFill>
-          <a:blip r:embed="rId4"/>
-          <a:stretch>
-            <a:fillRect/>
-          </a:stretch>
-        </p:blipFill>
-        <p:spPr>
-          <a:xfrm>
-            <a:off x="1051928" y="2886456"/>
-            <a:ext cx="2883664" cy="1471870"/>
-          </a:xfrm>
-          <a:prstGeom prst="rect">
-            <a:avLst/>
-          </a:prstGeom>
-          <a:ln w="28575">
-            <a:solidFill>
-              <a:srgbClr val="B177BF"/>
-            </a:solidFill>
-          </a:ln>
-        </p:spPr>
-      </p:pic>
-      <p:sp>
-        <p:nvSpPr>
-          <p:cNvPr id="14" name="ZoneTexte 13">
-            <a:extLst>
-              <a:ext uri="{FF2B5EF4-FFF2-40B4-BE49-F238E27FC236}">
-                <a16:creationId xmlns:a16="http://schemas.microsoft.com/office/drawing/2014/main" id="{6CAF220D-8AAE-401C-A104-3F274EAA1D6A}"/>
-              </a:ext>
-            </a:extLst>
-          </p:cNvPr>
-          <p:cNvSpPr txBox="1"/>
-          <p:nvPr/>
-        </p:nvSpPr>
-        <p:spPr>
-          <a:xfrm>
-            <a:off x="5266944" y="5559431"/>
-            <a:ext cx="5974755" cy="646331"/>
-          </a:xfrm>
-          <a:prstGeom prst="rect">
-            <a:avLst/>
-          </a:prstGeom>
-          <a:noFill/>
-        </p:spPr>
-        <p:txBody>
-          <a:bodyPr wrap="square" rtlCol="0">
-            <a:spAutoFit/>
-          </a:bodyPr>
-          <a:lstStyle/>
-          <a:p>
-            <a:r>
-              <a:rPr lang="fr-CA" dirty="0">
-                <a:solidFill>
-                  <a:srgbClr val="B177BF"/>
-                </a:solidFill>
-              </a:rPr>
-              <a:t>On a un bug ! </a:t>
-            </a:r>
-            <a:r>
-              <a:rPr lang="en-CA" dirty="0">
-                <a:solidFill>
-                  <a:srgbClr val="B177BF"/>
-                </a:solidFill>
-              </a:rPr>
-              <a:t>🐞</a:t>
-            </a:r>
-            <a:r>
-              <a:rPr lang="fr-CA" dirty="0">
-                <a:solidFill>
-                  <a:srgbClr val="B177BF"/>
-                </a:solidFill>
-              </a:rPr>
-              <a:t> La variable globale </a:t>
-            </a:r>
-            <a:r>
-              <a:rPr lang="fr-CA" b="1" dirty="0">
-                <a:latin typeface="Courier New" panose="02070309020205020404" pitchFamily="49" charset="0"/>
-                <a:cs typeface="Courier New" panose="02070309020205020404" pitchFamily="49" charset="0"/>
-              </a:rPr>
-              <a:t>gTemps</a:t>
-            </a:r>
-            <a:r>
-              <a:rPr lang="fr-CA" dirty="0">
-                <a:solidFill>
-                  <a:srgbClr val="B177BF"/>
-                </a:solidFill>
-              </a:rPr>
-              <a:t> vaut </a:t>
-            </a:r>
-            <a:r>
-              <a:rPr lang="fr-CA" dirty="0">
-                <a:solidFill>
-                  <a:srgbClr val="C00000"/>
-                </a:solidFill>
-              </a:rPr>
-              <a:t>"jour"</a:t>
-            </a:r>
-            <a:r>
-              <a:rPr lang="fr-CA" dirty="0">
-                <a:solidFill>
-                  <a:srgbClr val="B177BF"/>
-                </a:solidFill>
-              </a:rPr>
-              <a:t>, et non </a:t>
-            </a:r>
-            <a:r>
-              <a:rPr lang="fr-CA" dirty="0">
-                <a:solidFill>
-                  <a:srgbClr val="C00000"/>
-                </a:solidFill>
-              </a:rPr>
-              <a:t>"soir"</a:t>
-            </a:r>
-            <a:r>
-              <a:rPr lang="fr-CA" dirty="0">
-                <a:solidFill>
-                  <a:srgbClr val="B177BF"/>
-                </a:solidFill>
-              </a:rPr>
-              <a:t>, alors l’alerte aurait dû mentionner "Bonjour" !</a:t>
-            </a:r>
-          </a:p>
-        </p:txBody>
-      </p:sp>
-    </p:spTree>
-    <p:extLst>
-      <p:ext uri="{BB962C8B-B14F-4D97-AF65-F5344CB8AC3E}">
-        <p14:creationId xmlns:p14="http://schemas.microsoft.com/office/powerpoint/2010/main" val="204530052"/>
-      </p:ext>
-    </p:extLst>
-  </p:cSld>
-  <p:clrMapOvr>
-    <a:masterClrMapping/>
-  </p:clrMapOvr>
-</p:sld>
-</file>
-
-<file path=ppt/slides/slide36.xml><?xml version="1.0" encoding="utf-8"?>
-<p:sld xmlns:a="http://schemas.openxmlformats.org/drawingml/2006/main" xmlns:r="http://schemas.openxmlformats.org/officeDocument/2006/relationships" xmlns:p="http://schemas.openxmlformats.org/presentationml/2006/main">
-  <p:cSld>
-    <p:spTree>
-      <p:nvGrpSpPr>
-        <p:cNvPr id="1" name=""/>
-        <p:cNvGrpSpPr/>
-        <p:nvPr/>
-      </p:nvGrpSpPr>
-      <p:grpSpPr>
-        <a:xfrm>
-          <a:off x="0" y="0"/>
-          <a:ext cx="0" cy="0"/>
-          <a:chOff x="0" y="0"/>
-          <a:chExt cx="0" cy="0"/>
-        </a:xfrm>
-      </p:grpSpPr>
-      <p:sp>
-        <p:nvSpPr>
-          <p:cNvPr id="2" name="Espace réservé du contenu 1">
-            <a:extLst>
-              <a:ext uri="{FF2B5EF4-FFF2-40B4-BE49-F238E27FC236}">
-                <a16:creationId xmlns:a16="http://schemas.microsoft.com/office/drawing/2014/main" id="{D175B3B4-CDD9-482F-AD6E-26EEB3AD0D65}"/>
-              </a:ext>
-            </a:extLst>
-          </p:cNvPr>
-          <p:cNvSpPr>
-            <a:spLocks noGrp="1"/>
-          </p:cNvSpPr>
-          <p:nvPr>
-            <p:ph idx="1"/>
-          </p:nvPr>
-        </p:nvSpPr>
-        <p:spPr/>
-        <p:txBody>
-          <a:bodyPr/>
-          <a:lstStyle/>
-          <a:p>
-            <a:r>
-              <a:rPr lang="fr-CA" dirty="0"/>
-              <a:t> Débogage avec VS Code</a:t>
-            </a:r>
-          </a:p>
-          <a:p>
-            <a:pPr lvl="1"/>
-            <a:r>
-              <a:rPr lang="fr-CA" dirty="0"/>
-              <a:t> </a:t>
-            </a:r>
-            <a:r>
-              <a:rPr lang="fr-CA" dirty="0">
-                <a:solidFill>
-                  <a:srgbClr val="FA4098"/>
-                </a:solidFill>
-              </a:rPr>
-              <a:t>Étape 2</a:t>
-            </a:r>
-            <a:r>
-              <a:rPr lang="fr-CA" dirty="0"/>
-              <a:t> : Mettre un ou plusieurs </a:t>
-            </a:r>
-            <a:r>
-              <a:rPr lang="fr-CA" b="1" dirty="0">
-                <a:solidFill>
-                  <a:srgbClr val="FA4098"/>
-                </a:solidFill>
-              </a:rPr>
-              <a:t>points d’arrêt</a:t>
-            </a:r>
-            <a:r>
-              <a:rPr lang="fr-CA" dirty="0"/>
-              <a:t> dans la fonction</a:t>
-            </a:r>
-          </a:p>
-          <a:p>
-            <a:pPr lvl="1"/>
-            <a:endParaRPr lang="fr-CA" dirty="0"/>
-          </a:p>
-          <a:p>
-            <a:pPr lvl="1"/>
-            <a:endParaRPr lang="fr-CA" dirty="0"/>
-          </a:p>
-          <a:p>
-            <a:pPr lvl="1"/>
-            <a:endParaRPr lang="fr-CA" dirty="0"/>
-          </a:p>
-          <a:p>
-            <a:pPr lvl="1"/>
-            <a:endParaRPr lang="fr-CA" dirty="0"/>
-          </a:p>
-          <a:p>
-            <a:pPr lvl="1"/>
-            <a:endParaRPr lang="fr-CA" dirty="0"/>
-          </a:p>
-          <a:p>
-            <a:pPr lvl="1"/>
-            <a:endParaRPr lang="fr-CA" dirty="0"/>
-          </a:p>
-          <a:p>
-            <a:pPr lvl="1"/>
-            <a:endParaRPr lang="fr-CA" dirty="0"/>
-          </a:p>
-          <a:p>
-            <a:pPr lvl="2"/>
-            <a:r>
-              <a:rPr lang="fr-CA" dirty="0"/>
-              <a:t> Où mettre le point d’arrêt ?</a:t>
-            </a:r>
-          </a:p>
-          <a:p>
-            <a:pPr lvl="3"/>
-            <a:r>
-              <a:rPr lang="fr-CA" dirty="0"/>
-              <a:t> Option 1 : Sur une ou plusieurs lignes de code qu’on pense fautives.</a:t>
-            </a:r>
-          </a:p>
-          <a:p>
-            <a:pPr lvl="3"/>
-            <a:r>
-              <a:rPr lang="fr-CA" dirty="0"/>
-              <a:t> Option 2 : Au tout début de la fonction si on souhaite l’analyser en entier.</a:t>
-            </a:r>
-          </a:p>
-        </p:txBody>
-      </p:sp>
-      <p:sp>
-        <p:nvSpPr>
-          <p:cNvPr id="3" name="Titre 2">
-            <a:extLst>
-              <a:ext uri="{FF2B5EF4-FFF2-40B4-BE49-F238E27FC236}">
-                <a16:creationId xmlns:a16="http://schemas.microsoft.com/office/drawing/2014/main" id="{08626D7E-0E2B-41DD-A935-9F2BB87645EF}"/>
-              </a:ext>
-            </a:extLst>
-          </p:cNvPr>
-          <p:cNvSpPr>
-            <a:spLocks noGrp="1"/>
-          </p:cNvSpPr>
-          <p:nvPr>
-            <p:ph type="title"/>
-          </p:nvPr>
-        </p:nvSpPr>
-        <p:spPr/>
-        <p:txBody>
-          <a:bodyPr/>
-          <a:lstStyle/>
-          <a:p>
-            <a:r>
-              <a:rPr lang="fr-CA" dirty="0"/>
-              <a:t>Débogage avec VS Code</a:t>
-            </a:r>
-          </a:p>
-        </p:txBody>
-      </p:sp>
-      <p:pic>
-        <p:nvPicPr>
-          <p:cNvPr id="5" name="Image 4">
-            <a:extLst>
-              <a:ext uri="{FF2B5EF4-FFF2-40B4-BE49-F238E27FC236}">
-                <a16:creationId xmlns:a16="http://schemas.microsoft.com/office/drawing/2014/main" id="{FE2AC759-79FE-4ACE-B750-360898845F86}"/>
-              </a:ext>
-            </a:extLst>
-          </p:cNvPr>
-          <p:cNvPicPr>
-            <a:picLocks noChangeAspect="1"/>
-          </p:cNvPicPr>
-          <p:nvPr/>
-        </p:nvPicPr>
-        <p:blipFill>
-          <a:blip r:embed="rId2"/>
-          <a:stretch>
-            <a:fillRect/>
-          </a:stretch>
-        </p:blipFill>
-        <p:spPr>
-          <a:xfrm>
-            <a:off x="8086274" y="2252126"/>
-            <a:ext cx="3724795" cy="2219635"/>
-          </a:xfrm>
-          <a:prstGeom prst="rect">
-            <a:avLst/>
-          </a:prstGeom>
-          <a:ln w="28575">
-            <a:solidFill>
-              <a:srgbClr val="B177BF"/>
-            </a:solidFill>
-          </a:ln>
-        </p:spPr>
-      </p:pic>
-      <p:sp>
-        <p:nvSpPr>
-          <p:cNvPr id="8" name="ZoneTexte 7">
-            <a:extLst>
-              <a:ext uri="{FF2B5EF4-FFF2-40B4-BE49-F238E27FC236}">
-                <a16:creationId xmlns:a16="http://schemas.microsoft.com/office/drawing/2014/main" id="{AFC4C3CB-7250-4F48-B66A-276E9D43E992}"/>
-              </a:ext>
-            </a:extLst>
-          </p:cNvPr>
-          <p:cNvSpPr txBox="1"/>
-          <p:nvPr/>
-        </p:nvSpPr>
-        <p:spPr>
-          <a:xfrm>
-            <a:off x="1130808" y="2828835"/>
-            <a:ext cx="6416040" cy="1200329"/>
-          </a:xfrm>
-          <a:prstGeom prst="rect">
-            <a:avLst/>
-          </a:prstGeom>
-          <a:noFill/>
-        </p:spPr>
-        <p:txBody>
-          <a:bodyPr wrap="square" rtlCol="0">
-            <a:spAutoFit/>
-          </a:bodyPr>
-          <a:lstStyle/>
-          <a:p>
-            <a:r>
-              <a:rPr lang="fr-CA" dirty="0">
-                <a:solidFill>
-                  <a:srgbClr val="B177BF"/>
-                </a:solidFill>
-              </a:rPr>
-              <a:t>• Pour mettre un point d’arrêt dans Visual Studio Code, il faut appuyer dans la marge. (à gauche du numéro de ligne) </a:t>
-            </a:r>
-          </a:p>
-          <a:p>
-            <a:r>
-              <a:rPr lang="fr-CA" dirty="0">
-                <a:solidFill>
-                  <a:srgbClr val="B177BF"/>
-                </a:solidFill>
-              </a:rPr>
-              <a:t>• Cela fera apparaître un cercle rouge, qui sert à indiquer qu’il y a un point d’arrêt sur cette ligne.</a:t>
-            </a:r>
-          </a:p>
-        </p:txBody>
-      </p:sp>
-      <p:cxnSp>
-        <p:nvCxnSpPr>
-          <p:cNvPr id="15" name="Connecteur droit avec flèche 14">
-            <a:extLst>
-              <a:ext uri="{FF2B5EF4-FFF2-40B4-BE49-F238E27FC236}">
-                <a16:creationId xmlns:a16="http://schemas.microsoft.com/office/drawing/2014/main" id="{95433089-0929-4727-BAF1-174DD699F835}"/>
-              </a:ext>
-            </a:extLst>
-          </p:cNvPr>
-          <p:cNvCxnSpPr>
-            <a:cxnSpLocks/>
-          </p:cNvCxnSpPr>
-          <p:nvPr/>
-        </p:nvCxnSpPr>
-        <p:spPr>
-          <a:xfrm>
-            <a:off x="7437120" y="2353606"/>
-            <a:ext cx="550129" cy="383498"/>
-          </a:xfrm>
-          <a:prstGeom prst="straightConnector1">
-            <a:avLst/>
-          </a:prstGeom>
-          <a:ln w="57150">
-            <a:solidFill>
-              <a:srgbClr val="FA4098"/>
-            </a:solidFill>
-            <a:tailEnd type="triangle"/>
-          </a:ln>
-        </p:spPr>
-        <p:style>
-          <a:lnRef idx="1">
-            <a:schemeClr val="accent1"/>
-          </a:lnRef>
-          <a:fillRef idx="0">
-            <a:schemeClr val="accent1"/>
-          </a:fillRef>
-          <a:effectRef idx="0">
-            <a:schemeClr val="accent1"/>
-          </a:effectRef>
-          <a:fontRef idx="minor">
-            <a:schemeClr val="tx1"/>
-          </a:fontRef>
-        </p:style>
-      </p:cxnSp>
-    </p:spTree>
-    <p:extLst>
-      <p:ext uri="{BB962C8B-B14F-4D97-AF65-F5344CB8AC3E}">
-        <p14:creationId xmlns:p14="http://schemas.microsoft.com/office/powerpoint/2010/main" val="1403925236"/>
-      </p:ext>
-    </p:extLst>
-  </p:cSld>
-  <p:clrMapOvr>
-    <a:masterClrMapping/>
-  </p:clrMapOvr>
-</p:sld>
-</file>
-
-<file path=ppt/slides/slide37.xml><?xml version="1.0" encoding="utf-8"?>
-<p:sld xmlns:a="http://schemas.openxmlformats.org/drawingml/2006/main" xmlns:r="http://schemas.openxmlformats.org/officeDocument/2006/relationships" xmlns:p="http://schemas.openxmlformats.org/presentationml/2006/main">
-  <p:cSld>
-    <p:spTree>
-      <p:nvGrpSpPr>
-        <p:cNvPr id="1" name=""/>
-        <p:cNvGrpSpPr/>
-        <p:nvPr/>
-      </p:nvGrpSpPr>
-      <p:grpSpPr>
-        <a:xfrm>
-          <a:off x="0" y="0"/>
-          <a:ext cx="0" cy="0"/>
-          <a:chOff x="0" y="0"/>
-          <a:chExt cx="0" cy="0"/>
-        </a:xfrm>
-      </p:grpSpPr>
-      <p:sp>
-        <p:nvSpPr>
-          <p:cNvPr id="2" name="Espace réservé du contenu 1">
-            <a:extLst>
-              <a:ext uri="{FF2B5EF4-FFF2-40B4-BE49-F238E27FC236}">
-                <a16:creationId xmlns:a16="http://schemas.microsoft.com/office/drawing/2014/main" id="{D175B3B4-CDD9-482F-AD6E-26EEB3AD0D65}"/>
-              </a:ext>
-            </a:extLst>
-          </p:cNvPr>
-          <p:cNvSpPr>
-            <a:spLocks noGrp="1"/>
-          </p:cNvSpPr>
-          <p:nvPr>
-            <p:ph idx="1"/>
-          </p:nvPr>
-        </p:nvSpPr>
-        <p:spPr/>
-        <p:txBody>
-          <a:bodyPr/>
-          <a:lstStyle/>
-          <a:p>
-            <a:r>
-              <a:rPr lang="fr-CA" dirty="0"/>
-              <a:t> Débogage avec VS Code</a:t>
-            </a:r>
-          </a:p>
-          <a:p>
-            <a:pPr lvl="1"/>
-            <a:r>
-              <a:rPr lang="fr-CA" dirty="0"/>
-              <a:t> </a:t>
-            </a:r>
-            <a:r>
-              <a:rPr lang="fr-CA" dirty="0">
-                <a:solidFill>
-                  <a:srgbClr val="FA4098"/>
-                </a:solidFill>
-              </a:rPr>
-              <a:t>Étape 3</a:t>
-            </a:r>
-            <a:r>
-              <a:rPr lang="fr-CA" dirty="0"/>
-              <a:t> : Sélectionner le fichier .html du projet dans VS Code </a:t>
-            </a:r>
-          </a:p>
-          <a:p>
-            <a:pPr lvl="1"/>
-            <a:endParaRPr lang="fr-CA" dirty="0"/>
-          </a:p>
-          <a:p>
-            <a:pPr lvl="1"/>
-            <a:endParaRPr lang="fr-CA" dirty="0"/>
-          </a:p>
-        </p:txBody>
-      </p:sp>
-      <p:sp>
-        <p:nvSpPr>
-          <p:cNvPr id="3" name="Titre 2">
-            <a:extLst>
-              <a:ext uri="{FF2B5EF4-FFF2-40B4-BE49-F238E27FC236}">
-                <a16:creationId xmlns:a16="http://schemas.microsoft.com/office/drawing/2014/main" id="{08626D7E-0E2B-41DD-A935-9F2BB87645EF}"/>
-              </a:ext>
-            </a:extLst>
-          </p:cNvPr>
-          <p:cNvSpPr>
-            <a:spLocks noGrp="1"/>
-          </p:cNvSpPr>
-          <p:nvPr>
-            <p:ph type="title"/>
-          </p:nvPr>
-        </p:nvSpPr>
-        <p:spPr/>
-        <p:txBody>
-          <a:bodyPr/>
-          <a:lstStyle/>
-          <a:p>
-            <a:r>
-              <a:rPr lang="fr-CA" dirty="0"/>
-              <a:t>Débogage avec VS Code</a:t>
-            </a:r>
-          </a:p>
-        </p:txBody>
-      </p:sp>
-      <p:pic>
-        <p:nvPicPr>
-          <p:cNvPr id="9" name="Image 8">
-            <a:extLst>
-              <a:ext uri="{FF2B5EF4-FFF2-40B4-BE49-F238E27FC236}">
-                <a16:creationId xmlns:a16="http://schemas.microsoft.com/office/drawing/2014/main" id="{FF9A09A6-BACD-44DA-8E24-4509358BE08B}"/>
-              </a:ext>
-            </a:extLst>
-          </p:cNvPr>
-          <p:cNvPicPr>
-            <a:picLocks noChangeAspect="1"/>
-          </p:cNvPicPr>
-          <p:nvPr/>
-        </p:nvPicPr>
-        <p:blipFill>
-          <a:blip r:embed="rId2"/>
-          <a:stretch>
-            <a:fillRect/>
-          </a:stretch>
-        </p:blipFill>
-        <p:spPr>
-          <a:xfrm>
-            <a:off x="2450379" y="2659003"/>
-            <a:ext cx="7287642" cy="3048425"/>
-          </a:xfrm>
-          <a:prstGeom prst="rect">
-            <a:avLst/>
-          </a:prstGeom>
-          <a:ln w="28575">
-            <a:solidFill>
-              <a:srgbClr val="B177BF"/>
-            </a:solidFill>
-          </a:ln>
-        </p:spPr>
-      </p:pic>
-      <p:cxnSp>
-        <p:nvCxnSpPr>
-          <p:cNvPr id="11" name="Connecteur droit avec flèche 10">
-            <a:extLst>
-              <a:ext uri="{FF2B5EF4-FFF2-40B4-BE49-F238E27FC236}">
-                <a16:creationId xmlns:a16="http://schemas.microsoft.com/office/drawing/2014/main" id="{F6F03936-CCCB-45BF-8BEB-DCEACD3E1683}"/>
-              </a:ext>
-            </a:extLst>
-          </p:cNvPr>
-          <p:cNvCxnSpPr>
-            <a:cxnSpLocks/>
-          </p:cNvCxnSpPr>
-          <p:nvPr/>
-        </p:nvCxnSpPr>
-        <p:spPr>
-          <a:xfrm>
-            <a:off x="4108704" y="2384086"/>
-            <a:ext cx="550129" cy="383498"/>
-          </a:xfrm>
-          <a:prstGeom prst="straightConnector1">
-            <a:avLst/>
-          </a:prstGeom>
-          <a:ln w="57150">
-            <a:solidFill>
-              <a:srgbClr val="FA4098"/>
-            </a:solidFill>
-            <a:tailEnd type="triangle"/>
-          </a:ln>
-        </p:spPr>
-        <p:style>
-          <a:lnRef idx="1">
-            <a:schemeClr val="accent1"/>
-          </a:lnRef>
-          <a:fillRef idx="0">
-            <a:schemeClr val="accent1"/>
-          </a:fillRef>
-          <a:effectRef idx="0">
-            <a:schemeClr val="accent1"/>
-          </a:effectRef>
-          <a:fontRef idx="minor">
-            <a:schemeClr val="tx1"/>
-          </a:fontRef>
-        </p:style>
-      </p:cxnSp>
-      <p:cxnSp>
-        <p:nvCxnSpPr>
-          <p:cNvPr id="12" name="Connecteur droit avec flèche 11">
-            <a:extLst>
-              <a:ext uri="{FF2B5EF4-FFF2-40B4-BE49-F238E27FC236}">
-                <a16:creationId xmlns:a16="http://schemas.microsoft.com/office/drawing/2014/main" id="{41DDEE54-C301-4908-B11B-5D576E8FDFE4}"/>
-              </a:ext>
-            </a:extLst>
-          </p:cNvPr>
-          <p:cNvCxnSpPr>
-            <a:cxnSpLocks/>
-          </p:cNvCxnSpPr>
-          <p:nvPr/>
-        </p:nvCxnSpPr>
-        <p:spPr>
-          <a:xfrm>
-            <a:off x="2005584" y="5078518"/>
-            <a:ext cx="550129" cy="383498"/>
-          </a:xfrm>
-          <a:prstGeom prst="straightConnector1">
-            <a:avLst/>
-          </a:prstGeom>
-          <a:ln w="57150">
-            <a:solidFill>
-              <a:srgbClr val="FA4098"/>
-            </a:solidFill>
-            <a:tailEnd type="triangle"/>
-          </a:ln>
-        </p:spPr>
-        <p:style>
-          <a:lnRef idx="1">
-            <a:schemeClr val="accent1"/>
-          </a:lnRef>
-          <a:fillRef idx="0">
-            <a:schemeClr val="accent1"/>
-          </a:fillRef>
-          <a:effectRef idx="0">
-            <a:schemeClr val="accent1"/>
-          </a:effectRef>
-          <a:fontRef idx="minor">
-            <a:schemeClr val="tx1"/>
-          </a:fontRef>
-        </p:style>
-      </p:cxnSp>
-    </p:spTree>
-    <p:extLst>
-      <p:ext uri="{BB962C8B-B14F-4D97-AF65-F5344CB8AC3E}">
-        <p14:creationId xmlns:p14="http://schemas.microsoft.com/office/powerpoint/2010/main" val="1831520937"/>
-      </p:ext>
-    </p:extLst>
-  </p:cSld>
-  <p:clrMapOvr>
-    <a:masterClrMapping/>
-  </p:clrMapOvr>
-</p:sld>
-</file>
-
-<file path=ppt/slides/slide38.xml><?xml version="1.0" encoding="utf-8"?>
-<p:sld xmlns:a="http://schemas.openxmlformats.org/drawingml/2006/main" xmlns:r="http://schemas.openxmlformats.org/officeDocument/2006/relationships" xmlns:p="http://schemas.openxmlformats.org/presentationml/2006/main">
-  <p:cSld>
-    <p:spTree>
-      <p:nvGrpSpPr>
-        <p:cNvPr id="1" name=""/>
-        <p:cNvGrpSpPr/>
-        <p:nvPr/>
-      </p:nvGrpSpPr>
-      <p:grpSpPr>
-        <a:xfrm>
-          <a:off x="0" y="0"/>
-          <a:ext cx="0" cy="0"/>
-          <a:chOff x="0" y="0"/>
-          <a:chExt cx="0" cy="0"/>
-        </a:xfrm>
-      </p:grpSpPr>
-      <p:sp>
-        <p:nvSpPr>
-          <p:cNvPr id="2" name="Espace réservé du contenu 1">
-            <a:extLst>
-              <a:ext uri="{FF2B5EF4-FFF2-40B4-BE49-F238E27FC236}">
-                <a16:creationId xmlns:a16="http://schemas.microsoft.com/office/drawing/2014/main" id="{D175B3B4-CDD9-482F-AD6E-26EEB3AD0D65}"/>
-              </a:ext>
-            </a:extLst>
-          </p:cNvPr>
-          <p:cNvSpPr>
-            <a:spLocks noGrp="1"/>
-          </p:cNvSpPr>
-          <p:nvPr>
-            <p:ph idx="1"/>
-          </p:nvPr>
-        </p:nvSpPr>
-        <p:spPr/>
-        <p:txBody>
-          <a:bodyPr/>
-          <a:lstStyle/>
-          <a:p>
-            <a:r>
-              <a:rPr lang="fr-CA" dirty="0"/>
-              <a:t> Débogage avec VS Code</a:t>
-            </a:r>
-          </a:p>
-          <a:p>
-            <a:pPr lvl="1"/>
-            <a:r>
-              <a:rPr lang="fr-CA" dirty="0"/>
-              <a:t> </a:t>
-            </a:r>
-            <a:r>
-              <a:rPr lang="fr-CA" dirty="0">
-                <a:solidFill>
-                  <a:srgbClr val="FA4098"/>
-                </a:solidFill>
-              </a:rPr>
-              <a:t>Étape 4</a:t>
-            </a:r>
-            <a:r>
-              <a:rPr lang="fr-CA" dirty="0"/>
-              <a:t> : Exécuter -&gt; Démarrer le débogage (Sélectionnez le navigateur de votre choix)</a:t>
-            </a:r>
-          </a:p>
-          <a:p>
-            <a:pPr lvl="1"/>
-            <a:endParaRPr lang="fr-CA" dirty="0"/>
-          </a:p>
-          <a:p>
-            <a:pPr lvl="1"/>
-            <a:endParaRPr lang="fr-CA" dirty="0"/>
-          </a:p>
-          <a:p>
-            <a:pPr lvl="1"/>
-            <a:endParaRPr lang="fr-CA" dirty="0"/>
-          </a:p>
-          <a:p>
-            <a:pPr lvl="1"/>
-            <a:r>
-              <a:rPr lang="fr-CA" dirty="0"/>
-              <a:t>Une fois la page Web ouverte dans le navigateur, appeler la fonction que vous souhaitez tester</a:t>
-            </a:r>
-          </a:p>
-          <a:p>
-            <a:pPr lvl="1"/>
-            <a:endParaRPr lang="fr-CA" dirty="0"/>
-          </a:p>
-          <a:p>
-            <a:pPr lvl="1"/>
-            <a:endParaRPr lang="fr-CA" dirty="0"/>
-          </a:p>
-        </p:txBody>
-      </p:sp>
-      <p:sp>
-        <p:nvSpPr>
-          <p:cNvPr id="3" name="Titre 2">
-            <a:extLst>
-              <a:ext uri="{FF2B5EF4-FFF2-40B4-BE49-F238E27FC236}">
-                <a16:creationId xmlns:a16="http://schemas.microsoft.com/office/drawing/2014/main" id="{08626D7E-0E2B-41DD-A935-9F2BB87645EF}"/>
-              </a:ext>
-            </a:extLst>
-          </p:cNvPr>
-          <p:cNvSpPr>
-            <a:spLocks noGrp="1"/>
-          </p:cNvSpPr>
-          <p:nvPr>
-            <p:ph type="title"/>
-          </p:nvPr>
-        </p:nvSpPr>
-        <p:spPr/>
-        <p:txBody>
-          <a:bodyPr/>
-          <a:lstStyle/>
-          <a:p>
-            <a:r>
-              <a:rPr lang="fr-CA" dirty="0"/>
-              <a:t>Débogage avec VS Code</a:t>
-            </a:r>
-          </a:p>
-        </p:txBody>
-      </p:sp>
-      <p:pic>
-        <p:nvPicPr>
-          <p:cNvPr id="5" name="Image 4">
-            <a:extLst>
-              <a:ext uri="{FF2B5EF4-FFF2-40B4-BE49-F238E27FC236}">
-                <a16:creationId xmlns:a16="http://schemas.microsoft.com/office/drawing/2014/main" id="{ACD79D6A-9443-4F0E-BFCE-34B7B4F22755}"/>
-              </a:ext>
-            </a:extLst>
-          </p:cNvPr>
-          <p:cNvPicPr>
-            <a:picLocks noChangeAspect="1"/>
-          </p:cNvPicPr>
-          <p:nvPr/>
-        </p:nvPicPr>
-        <p:blipFill>
-          <a:blip r:embed="rId2"/>
-          <a:stretch>
-            <a:fillRect/>
-          </a:stretch>
-        </p:blipFill>
-        <p:spPr>
-          <a:xfrm>
-            <a:off x="4084144" y="2488447"/>
-            <a:ext cx="4020111" cy="771633"/>
-          </a:xfrm>
-          <a:prstGeom prst="rect">
-            <a:avLst/>
-          </a:prstGeom>
-          <a:ln w="28575">
-            <a:solidFill>
-              <a:srgbClr val="B177BF"/>
-            </a:solidFill>
-          </a:ln>
-        </p:spPr>
-      </p:pic>
-      <p:pic>
-        <p:nvPicPr>
-          <p:cNvPr id="7" name="Image 6">
-            <a:extLst>
-              <a:ext uri="{FF2B5EF4-FFF2-40B4-BE49-F238E27FC236}">
-                <a16:creationId xmlns:a16="http://schemas.microsoft.com/office/drawing/2014/main" id="{52317CEB-4A82-40DB-A74F-8BB2B42B3563}"/>
-              </a:ext>
-            </a:extLst>
-          </p:cNvPr>
-          <p:cNvPicPr>
-            <a:picLocks noChangeAspect="1"/>
-          </p:cNvPicPr>
-          <p:nvPr/>
-        </p:nvPicPr>
-        <p:blipFill>
-          <a:blip r:embed="rId3"/>
-          <a:stretch>
-            <a:fillRect/>
-          </a:stretch>
-        </p:blipFill>
-        <p:spPr>
-          <a:xfrm>
-            <a:off x="4467301" y="4303775"/>
-            <a:ext cx="3253795" cy="2426559"/>
-          </a:xfrm>
-          <a:prstGeom prst="rect">
-            <a:avLst/>
-          </a:prstGeom>
-          <a:ln w="28575">
-            <a:solidFill>
-              <a:srgbClr val="B177BF"/>
-            </a:solidFill>
-          </a:ln>
-        </p:spPr>
-      </p:pic>
-    </p:spTree>
-    <p:extLst>
-      <p:ext uri="{BB962C8B-B14F-4D97-AF65-F5344CB8AC3E}">
-        <p14:creationId xmlns:p14="http://schemas.microsoft.com/office/powerpoint/2010/main" val="2019289276"/>
-      </p:ext>
-    </p:extLst>
-  </p:cSld>
-  <p:clrMapOvr>
-    <a:masterClrMapping/>
-  </p:clrMapOvr>
-</p:sld>
-</file>
-
-<file path=ppt/slides/slide39.xml><?xml version="1.0" encoding="utf-8"?>
-<p:sld xmlns:a="http://schemas.openxmlformats.org/drawingml/2006/main" xmlns:r="http://schemas.openxmlformats.org/officeDocument/2006/relationships" xmlns:p="http://schemas.openxmlformats.org/presentationml/2006/main">
-  <p:cSld>
-    <p:spTree>
-      <p:nvGrpSpPr>
-        <p:cNvPr id="1" name=""/>
-        <p:cNvGrpSpPr/>
-        <p:nvPr/>
-      </p:nvGrpSpPr>
-      <p:grpSpPr>
-        <a:xfrm>
-          <a:off x="0" y="0"/>
-          <a:ext cx="0" cy="0"/>
-          <a:chOff x="0" y="0"/>
-          <a:chExt cx="0" cy="0"/>
-        </a:xfrm>
-      </p:grpSpPr>
-      <p:sp>
-        <p:nvSpPr>
-          <p:cNvPr id="2" name="Espace réservé du contenu 1">
-            <a:extLst>
-              <a:ext uri="{FF2B5EF4-FFF2-40B4-BE49-F238E27FC236}">
-                <a16:creationId xmlns:a16="http://schemas.microsoft.com/office/drawing/2014/main" id="{D175B3B4-CDD9-482F-AD6E-26EEB3AD0D65}"/>
-              </a:ext>
-            </a:extLst>
-          </p:cNvPr>
-          <p:cNvSpPr>
-            <a:spLocks noGrp="1"/>
-          </p:cNvSpPr>
-          <p:nvPr>
-            <p:ph idx="1"/>
-          </p:nvPr>
-        </p:nvSpPr>
-        <p:spPr>
-          <a:xfrm>
-            <a:off x="838200" y="1150572"/>
-            <a:ext cx="10512000" cy="5585508"/>
-          </a:xfrm>
-        </p:spPr>
-        <p:txBody>
-          <a:bodyPr/>
-          <a:lstStyle/>
-          <a:p>
-            <a:r>
-              <a:rPr lang="fr-CA" dirty="0"/>
-              <a:t> Débogage avec VS Code</a:t>
-            </a:r>
-          </a:p>
-          <a:p>
-            <a:pPr lvl="1"/>
-            <a:r>
-              <a:rPr lang="fr-CA" dirty="0"/>
-              <a:t> </a:t>
-            </a:r>
-            <a:r>
-              <a:rPr lang="fr-CA" dirty="0">
-                <a:solidFill>
-                  <a:srgbClr val="FF0000"/>
-                </a:solidFill>
-              </a:rPr>
-              <a:t>Si l’étape 4 ne marche pas</a:t>
-            </a:r>
-          </a:p>
-          <a:p>
-            <a:pPr lvl="2"/>
-            <a:r>
-              <a:rPr lang="fr-CA"/>
-              <a:t> Ex. Un </a:t>
-            </a:r>
-            <a:r>
-              <a:rPr lang="fr-CA" dirty="0"/>
-              <a:t>fichier </a:t>
-            </a:r>
-            <a:r>
-              <a:rPr lang="fr-CA" dirty="0">
-                <a:solidFill>
-                  <a:schemeClr val="tx1"/>
-                </a:solidFill>
-              </a:rPr>
-              <a:t>launch.json</a:t>
-            </a:r>
-            <a:r>
-              <a:rPr lang="fr-CA" dirty="0"/>
-              <a:t> apparait quand on refait « Démarrer le débogage </a:t>
-            </a:r>
-            <a:r>
-              <a:rPr lang="fr-CA"/>
-              <a:t>» et la </a:t>
-            </a:r>
-            <a:r>
-              <a:rPr lang="fr-CA" dirty="0"/>
-              <a:t>page Web ne charge pas. </a:t>
-            </a:r>
-          </a:p>
-          <a:p>
-            <a:pPr lvl="2"/>
-            <a:endParaRPr lang="fr-CA" dirty="0"/>
-          </a:p>
-          <a:p>
-            <a:pPr lvl="2"/>
-            <a:endParaRPr lang="fr-CA" dirty="0"/>
-          </a:p>
-          <a:p>
-            <a:pPr lvl="2"/>
-            <a:endParaRPr lang="fr-CA" dirty="0"/>
-          </a:p>
-          <a:p>
-            <a:pPr lvl="2"/>
-            <a:endParaRPr lang="fr-CA" dirty="0"/>
-          </a:p>
-          <a:p>
-            <a:pPr lvl="2"/>
-            <a:endParaRPr lang="fr-CA" dirty="0"/>
-          </a:p>
-          <a:p>
-            <a:pPr lvl="2"/>
-            <a:endParaRPr lang="fr-CA" dirty="0"/>
-          </a:p>
-          <a:p>
-            <a:pPr lvl="2"/>
-            <a:endParaRPr lang="fr-CA" dirty="0"/>
-          </a:p>
-          <a:p>
-            <a:pPr lvl="2"/>
-            <a:r>
-              <a:rPr lang="fr-CA" dirty="0"/>
-              <a:t> Il faut :</a:t>
-            </a:r>
-          </a:p>
-          <a:p>
-            <a:pPr lvl="3"/>
-            <a:r>
-              <a:rPr lang="fr-CA" dirty="0"/>
-              <a:t>Fermer le navigateur de débogage</a:t>
-            </a:r>
-          </a:p>
-          <a:p>
-            <a:pPr lvl="3"/>
-            <a:r>
-              <a:rPr lang="fr-CA" dirty="0"/>
-              <a:t>Supprimer le dossier </a:t>
-            </a:r>
-            <a:r>
-              <a:rPr lang="fr-CA" dirty="0">
-                <a:solidFill>
-                  <a:schemeClr val="tx1"/>
-                </a:solidFill>
-              </a:rPr>
-              <a:t>.vscode</a:t>
-            </a:r>
-            <a:r>
-              <a:rPr lang="fr-CA" dirty="0"/>
-              <a:t> qui est apparu dans le projet</a:t>
-            </a:r>
-          </a:p>
-          <a:p>
-            <a:pPr lvl="3"/>
-            <a:r>
-              <a:rPr lang="fr-CA" dirty="0"/>
-              <a:t>Recommencer à l’étape 1</a:t>
-            </a:r>
-          </a:p>
-          <a:p>
-            <a:pPr lvl="1"/>
-            <a:endParaRPr lang="fr-CA" dirty="0"/>
-          </a:p>
-          <a:p>
-            <a:pPr lvl="1"/>
-            <a:endParaRPr lang="fr-CA" dirty="0"/>
-          </a:p>
-        </p:txBody>
-      </p:sp>
-      <p:sp>
-        <p:nvSpPr>
-          <p:cNvPr id="3" name="Titre 2">
-            <a:extLst>
-              <a:ext uri="{FF2B5EF4-FFF2-40B4-BE49-F238E27FC236}">
-                <a16:creationId xmlns:a16="http://schemas.microsoft.com/office/drawing/2014/main" id="{08626D7E-0E2B-41DD-A935-9F2BB87645EF}"/>
-              </a:ext>
-            </a:extLst>
-          </p:cNvPr>
-          <p:cNvSpPr>
-            <a:spLocks noGrp="1"/>
-          </p:cNvSpPr>
-          <p:nvPr>
-            <p:ph type="title"/>
-          </p:nvPr>
-        </p:nvSpPr>
-        <p:spPr/>
-        <p:txBody>
-          <a:bodyPr/>
-          <a:lstStyle/>
-          <a:p>
-            <a:r>
-              <a:rPr lang="fr-CA" dirty="0"/>
-              <a:t>Débogage avec VS Code</a:t>
-            </a:r>
-          </a:p>
-        </p:txBody>
-      </p:sp>
-      <p:pic>
-        <p:nvPicPr>
-          <p:cNvPr id="6" name="Image 5">
-            <a:extLst>
-              <a:ext uri="{FF2B5EF4-FFF2-40B4-BE49-F238E27FC236}">
-                <a16:creationId xmlns:a16="http://schemas.microsoft.com/office/drawing/2014/main" id="{2F0A35BE-EEFF-4394-ABAF-B5AE38D4CE58}"/>
-              </a:ext>
-            </a:extLst>
-          </p:cNvPr>
-          <p:cNvPicPr>
-            <a:picLocks noChangeAspect="1"/>
-          </p:cNvPicPr>
-          <p:nvPr/>
-        </p:nvPicPr>
-        <p:blipFill>
-          <a:blip r:embed="rId2"/>
-          <a:stretch>
-            <a:fillRect/>
-          </a:stretch>
-        </p:blipFill>
-        <p:spPr>
-          <a:xfrm>
-            <a:off x="1923484" y="2834640"/>
-            <a:ext cx="3966090" cy="1811064"/>
-          </a:xfrm>
-          <a:prstGeom prst="rect">
-            <a:avLst/>
-          </a:prstGeom>
-          <a:ln w="28575">
-            <a:solidFill>
-              <a:srgbClr val="B177BF"/>
-            </a:solidFill>
-          </a:ln>
-        </p:spPr>
-      </p:pic>
-      <p:pic>
-        <p:nvPicPr>
-          <p:cNvPr id="9" name="Image 8">
-            <a:extLst>
-              <a:ext uri="{FF2B5EF4-FFF2-40B4-BE49-F238E27FC236}">
-                <a16:creationId xmlns:a16="http://schemas.microsoft.com/office/drawing/2014/main" id="{408792E4-E446-4812-B3C2-E10A221CED47}"/>
-              </a:ext>
-            </a:extLst>
-          </p:cNvPr>
-          <p:cNvPicPr>
-            <a:picLocks noChangeAspect="1"/>
-          </p:cNvPicPr>
-          <p:nvPr/>
-        </p:nvPicPr>
-        <p:blipFill>
-          <a:blip r:embed="rId3"/>
-          <a:stretch>
-            <a:fillRect/>
-          </a:stretch>
-        </p:blipFill>
-        <p:spPr>
-          <a:xfrm>
-            <a:off x="6595293" y="2895884"/>
-            <a:ext cx="3755958" cy="1688576"/>
-          </a:xfrm>
-          <a:prstGeom prst="rect">
-            <a:avLst/>
-          </a:prstGeom>
-          <a:ln w="28575">
-            <a:solidFill>
-              <a:srgbClr val="B177BF"/>
-            </a:solidFill>
-          </a:ln>
-        </p:spPr>
-      </p:pic>
-      <p:pic>
-        <p:nvPicPr>
-          <p:cNvPr id="11" name="Image 10">
-            <a:extLst>
-              <a:ext uri="{FF2B5EF4-FFF2-40B4-BE49-F238E27FC236}">
-                <a16:creationId xmlns:a16="http://schemas.microsoft.com/office/drawing/2014/main" id="{41C2B4F4-84B2-498E-A70B-E565DC7A86B6}"/>
-              </a:ext>
-            </a:extLst>
-          </p:cNvPr>
-          <p:cNvPicPr>
-            <a:picLocks noChangeAspect="1"/>
-          </p:cNvPicPr>
-          <p:nvPr/>
-        </p:nvPicPr>
-        <p:blipFill>
-          <a:blip r:embed="rId4"/>
-          <a:stretch>
-            <a:fillRect/>
-          </a:stretch>
-        </p:blipFill>
-        <p:spPr>
-          <a:xfrm>
-            <a:off x="8163335" y="4973900"/>
-            <a:ext cx="2314898" cy="1467055"/>
-          </a:xfrm>
-          <a:prstGeom prst="rect">
-            <a:avLst/>
-          </a:prstGeom>
-          <a:ln w="28575">
-            <a:solidFill>
-              <a:srgbClr val="B177BF"/>
-            </a:solidFill>
-          </a:ln>
-        </p:spPr>
-      </p:pic>
-      <p:cxnSp>
-        <p:nvCxnSpPr>
-          <p:cNvPr id="12" name="Connecteur droit avec flèche 11">
-            <a:extLst>
-              <a:ext uri="{FF2B5EF4-FFF2-40B4-BE49-F238E27FC236}">
-                <a16:creationId xmlns:a16="http://schemas.microsoft.com/office/drawing/2014/main" id="{D197667D-DCEC-4EA8-B432-2582389232E2}"/>
-              </a:ext>
-            </a:extLst>
-          </p:cNvPr>
-          <p:cNvCxnSpPr>
-            <a:cxnSpLocks/>
-          </p:cNvCxnSpPr>
-          <p:nvPr/>
-        </p:nvCxnSpPr>
-        <p:spPr>
-          <a:xfrm flipH="1">
-            <a:off x="9144000" y="4809744"/>
-            <a:ext cx="603504" cy="473026"/>
-          </a:xfrm>
-          <a:prstGeom prst="straightConnector1">
-            <a:avLst/>
-          </a:prstGeom>
-          <a:ln w="57150">
-            <a:solidFill>
-              <a:srgbClr val="FA4098"/>
-            </a:solidFill>
-            <a:tailEnd type="triangle"/>
-          </a:ln>
-        </p:spPr>
-        <p:style>
-          <a:lnRef idx="1">
-            <a:schemeClr val="accent1"/>
-          </a:lnRef>
-          <a:fillRef idx="0">
-            <a:schemeClr val="accent1"/>
-          </a:fillRef>
-          <a:effectRef idx="0">
-            <a:schemeClr val="accent1"/>
-          </a:effectRef>
-          <a:fontRef idx="minor">
-            <a:schemeClr val="tx1"/>
-          </a:fontRef>
-        </p:style>
-      </p:cxnSp>
-    </p:spTree>
-    <p:extLst>
-      <p:ext uri="{BB962C8B-B14F-4D97-AF65-F5344CB8AC3E}">
-        <p14:creationId xmlns:p14="http://schemas.microsoft.com/office/powerpoint/2010/main" val="173599717"/>
-      </p:ext>
-    </p:extLst>
-  </p:cSld>
-  <p:clrMapOvr>
-    <a:masterClrMapping/>
-  </p:clrMapOvr>
-</p:sld>
-</file>
-
 <file path=ppt/slides/slide4.xml><?xml version="1.0" encoding="utf-8"?>
 <p:sld xmlns:a="http://schemas.openxmlformats.org/drawingml/2006/main" xmlns:r="http://schemas.openxmlformats.org/officeDocument/2006/relationships" xmlns:p="http://schemas.openxmlformats.org/presentationml/2006/main">
   <p:cSld>
@@ -16626,1477 +14878,6 @@
     <p:extLst>
       <p:ext uri="{BB962C8B-B14F-4D97-AF65-F5344CB8AC3E}">
         <p14:creationId xmlns:p14="http://schemas.microsoft.com/office/powerpoint/2010/main" val="3748072430"/>
-      </p:ext>
-    </p:extLst>
-  </p:cSld>
-  <p:clrMapOvr>
-    <a:masterClrMapping/>
-  </p:clrMapOvr>
-</p:sld>
-</file>
-
-<file path=ppt/slides/slide40.xml><?xml version="1.0" encoding="utf-8"?>
-<p:sld xmlns:a="http://schemas.openxmlformats.org/drawingml/2006/main" xmlns:r="http://schemas.openxmlformats.org/officeDocument/2006/relationships" xmlns:p="http://schemas.openxmlformats.org/presentationml/2006/main">
-  <p:cSld>
-    <p:spTree>
-      <p:nvGrpSpPr>
-        <p:cNvPr id="1" name=""/>
-        <p:cNvGrpSpPr/>
-        <p:nvPr/>
-      </p:nvGrpSpPr>
-      <p:grpSpPr>
-        <a:xfrm>
-          <a:off x="0" y="0"/>
-          <a:ext cx="0" cy="0"/>
-          <a:chOff x="0" y="0"/>
-          <a:chExt cx="0" cy="0"/>
-        </a:xfrm>
-      </p:grpSpPr>
-      <p:sp>
-        <p:nvSpPr>
-          <p:cNvPr id="2" name="Espace réservé du contenu 1">
-            <a:extLst>
-              <a:ext uri="{FF2B5EF4-FFF2-40B4-BE49-F238E27FC236}">
-                <a16:creationId xmlns:a16="http://schemas.microsoft.com/office/drawing/2014/main" id="{D175B3B4-CDD9-482F-AD6E-26EEB3AD0D65}"/>
-              </a:ext>
-            </a:extLst>
-          </p:cNvPr>
-          <p:cNvSpPr>
-            <a:spLocks noGrp="1"/>
-          </p:cNvSpPr>
-          <p:nvPr>
-            <p:ph idx="1"/>
-          </p:nvPr>
-        </p:nvSpPr>
-        <p:spPr/>
-        <p:txBody>
-          <a:bodyPr/>
-          <a:lstStyle/>
-          <a:p>
-            <a:r>
-              <a:rPr lang="fr-CA" dirty="0"/>
-              <a:t> Débogage avec VS Code</a:t>
-            </a:r>
-          </a:p>
-          <a:p>
-            <a:pPr lvl="1"/>
-            <a:r>
-              <a:rPr lang="fr-CA" dirty="0"/>
-              <a:t> </a:t>
-            </a:r>
-            <a:r>
-              <a:rPr lang="fr-CA" dirty="0">
-                <a:solidFill>
-                  <a:srgbClr val="FA4098"/>
-                </a:solidFill>
-              </a:rPr>
-              <a:t>Étape 5</a:t>
-            </a:r>
-            <a:r>
-              <a:rPr lang="fr-CA" dirty="0"/>
-              <a:t> : Jeter un coup d’œil dans VS Code</a:t>
-            </a:r>
-          </a:p>
-          <a:p>
-            <a:pPr lvl="2"/>
-            <a:r>
-              <a:rPr lang="fr-CA" dirty="0"/>
-              <a:t> En appelant la fonction, vous remarquerez que VS Code vous interpellera </a:t>
-            </a:r>
-          </a:p>
-          <a:p>
-            <a:pPr lvl="1"/>
-            <a:endParaRPr lang="fr-CA" dirty="0"/>
-          </a:p>
-          <a:p>
-            <a:pPr lvl="1"/>
-            <a:endParaRPr lang="fr-CA" dirty="0"/>
-          </a:p>
-        </p:txBody>
-      </p:sp>
-      <p:sp>
-        <p:nvSpPr>
-          <p:cNvPr id="3" name="Titre 2">
-            <a:extLst>
-              <a:ext uri="{FF2B5EF4-FFF2-40B4-BE49-F238E27FC236}">
-                <a16:creationId xmlns:a16="http://schemas.microsoft.com/office/drawing/2014/main" id="{08626D7E-0E2B-41DD-A935-9F2BB87645EF}"/>
-              </a:ext>
-            </a:extLst>
-          </p:cNvPr>
-          <p:cNvSpPr>
-            <a:spLocks noGrp="1"/>
-          </p:cNvSpPr>
-          <p:nvPr>
-            <p:ph type="title"/>
-          </p:nvPr>
-        </p:nvSpPr>
-        <p:spPr/>
-        <p:txBody>
-          <a:bodyPr/>
-          <a:lstStyle/>
-          <a:p>
-            <a:r>
-              <a:rPr lang="fr-CA" dirty="0"/>
-              <a:t>Débogage avec VS Code</a:t>
-            </a:r>
-          </a:p>
-        </p:txBody>
-      </p:sp>
-      <p:pic>
-        <p:nvPicPr>
-          <p:cNvPr id="5" name="Image 4">
-            <a:extLst>
-              <a:ext uri="{FF2B5EF4-FFF2-40B4-BE49-F238E27FC236}">
-                <a16:creationId xmlns:a16="http://schemas.microsoft.com/office/drawing/2014/main" id="{92AAC6AB-391F-4031-93FF-1ACEADD16C24}"/>
-              </a:ext>
-            </a:extLst>
-          </p:cNvPr>
-          <p:cNvPicPr>
-            <a:picLocks noChangeAspect="1"/>
-          </p:cNvPicPr>
-          <p:nvPr/>
-        </p:nvPicPr>
-        <p:blipFill>
-          <a:blip r:embed="rId2"/>
-          <a:stretch>
-            <a:fillRect/>
-          </a:stretch>
-        </p:blipFill>
-        <p:spPr>
-          <a:xfrm>
-            <a:off x="1955016" y="2789652"/>
-            <a:ext cx="2581635" cy="762106"/>
-          </a:xfrm>
-          <a:prstGeom prst="rect">
-            <a:avLst/>
-          </a:prstGeom>
-          <a:ln w="28575">
-            <a:solidFill>
-              <a:srgbClr val="B177BF"/>
-            </a:solidFill>
-          </a:ln>
-        </p:spPr>
-      </p:pic>
-      <p:pic>
-        <p:nvPicPr>
-          <p:cNvPr id="7" name="Image 6">
-            <a:extLst>
-              <a:ext uri="{FF2B5EF4-FFF2-40B4-BE49-F238E27FC236}">
-                <a16:creationId xmlns:a16="http://schemas.microsoft.com/office/drawing/2014/main" id="{3EE70639-FCC3-4546-96F0-A7DABB43E0AA}"/>
-              </a:ext>
-            </a:extLst>
-          </p:cNvPr>
-          <p:cNvPicPr>
-            <a:picLocks noChangeAspect="1"/>
-          </p:cNvPicPr>
-          <p:nvPr/>
-        </p:nvPicPr>
-        <p:blipFill>
-          <a:blip r:embed="rId3"/>
-          <a:stretch>
-            <a:fillRect/>
-          </a:stretch>
-        </p:blipFill>
-        <p:spPr>
-          <a:xfrm>
-            <a:off x="4784915" y="2401896"/>
-            <a:ext cx="2618570" cy="1615570"/>
-          </a:xfrm>
-          <a:prstGeom prst="rect">
-            <a:avLst/>
-          </a:prstGeom>
-          <a:ln w="28575">
-            <a:solidFill>
-              <a:srgbClr val="B177BF"/>
-            </a:solidFill>
-          </a:ln>
-        </p:spPr>
-      </p:pic>
-      <p:pic>
-        <p:nvPicPr>
-          <p:cNvPr id="9" name="Image 8">
-            <a:extLst>
-              <a:ext uri="{FF2B5EF4-FFF2-40B4-BE49-F238E27FC236}">
-                <a16:creationId xmlns:a16="http://schemas.microsoft.com/office/drawing/2014/main" id="{E0E9EE9A-56D5-423A-99D3-00BD796DBDC5}"/>
-              </a:ext>
-            </a:extLst>
-          </p:cNvPr>
-          <p:cNvPicPr>
-            <a:picLocks noChangeAspect="1"/>
-          </p:cNvPicPr>
-          <p:nvPr/>
-        </p:nvPicPr>
-        <p:blipFill>
-          <a:blip r:embed="rId4"/>
-          <a:stretch>
-            <a:fillRect/>
-          </a:stretch>
-        </p:blipFill>
-        <p:spPr>
-          <a:xfrm>
-            <a:off x="1506263" y="4811621"/>
-            <a:ext cx="1914792" cy="1857634"/>
-          </a:xfrm>
-          <a:prstGeom prst="rect">
-            <a:avLst/>
-          </a:prstGeom>
-          <a:ln w="28575">
-            <a:solidFill>
-              <a:srgbClr val="B177BF"/>
-            </a:solidFill>
-          </a:ln>
-        </p:spPr>
-      </p:pic>
-      <p:sp>
-        <p:nvSpPr>
-          <p:cNvPr id="10" name="ZoneTexte 9">
-            <a:extLst>
-              <a:ext uri="{FF2B5EF4-FFF2-40B4-BE49-F238E27FC236}">
-                <a16:creationId xmlns:a16="http://schemas.microsoft.com/office/drawing/2014/main" id="{FCE429C6-F320-47C5-BC84-B0159050C3B3}"/>
-              </a:ext>
-            </a:extLst>
-          </p:cNvPr>
-          <p:cNvSpPr txBox="1"/>
-          <p:nvPr/>
-        </p:nvSpPr>
-        <p:spPr>
-          <a:xfrm>
-            <a:off x="78261" y="4068348"/>
-            <a:ext cx="5688118" cy="646331"/>
-          </a:xfrm>
-          <a:prstGeom prst="rect">
-            <a:avLst/>
-          </a:prstGeom>
-          <a:noFill/>
-        </p:spPr>
-        <p:txBody>
-          <a:bodyPr wrap="square" rtlCol="0">
-            <a:spAutoFit/>
-          </a:bodyPr>
-          <a:lstStyle/>
-          <a:p>
-            <a:r>
-              <a:rPr lang="fr-CA" dirty="0">
-                <a:solidFill>
-                  <a:srgbClr val="B177BF"/>
-                </a:solidFill>
-              </a:rPr>
-              <a:t>• Dans le menu de gauche, on peut jeter un coup d’œil aux </a:t>
-            </a:r>
-            <a:r>
-              <a:rPr lang="fr-CA" b="1" dirty="0">
-                <a:solidFill>
-                  <a:srgbClr val="B177BF"/>
-                </a:solidFill>
-              </a:rPr>
-              <a:t>variables</a:t>
-            </a:r>
-            <a:r>
-              <a:rPr lang="fr-CA" dirty="0">
-                <a:solidFill>
-                  <a:srgbClr val="B177BF"/>
-                </a:solidFill>
-              </a:rPr>
-              <a:t>. Dans ce cas-ci, on voit que </a:t>
-            </a:r>
-            <a:r>
-              <a:rPr lang="fr-CA" b="1" dirty="0">
-                <a:latin typeface="Courier New" panose="02070309020205020404" pitchFamily="49" charset="0"/>
-                <a:cs typeface="Courier New" panose="02070309020205020404" pitchFamily="49" charset="0"/>
-              </a:rPr>
-              <a:t>gTemps</a:t>
-            </a:r>
-            <a:r>
-              <a:rPr lang="fr-CA" dirty="0">
-                <a:solidFill>
-                  <a:srgbClr val="B177BF"/>
-                </a:solidFill>
-              </a:rPr>
-              <a:t> vaut </a:t>
-            </a:r>
-            <a:r>
-              <a:rPr lang="fr-CA" dirty="0">
-                <a:solidFill>
-                  <a:srgbClr val="C00000"/>
-                </a:solidFill>
-              </a:rPr>
-              <a:t>"jour"</a:t>
-            </a:r>
-            <a:r>
-              <a:rPr lang="fr-CA" dirty="0">
-                <a:solidFill>
-                  <a:srgbClr val="B177BF"/>
-                </a:solidFill>
-              </a:rPr>
-              <a:t>. </a:t>
-            </a:r>
-          </a:p>
-        </p:txBody>
-      </p:sp>
-      <p:sp>
-        <p:nvSpPr>
-          <p:cNvPr id="11" name="ZoneTexte 10">
-            <a:extLst>
-              <a:ext uri="{FF2B5EF4-FFF2-40B4-BE49-F238E27FC236}">
-                <a16:creationId xmlns:a16="http://schemas.microsoft.com/office/drawing/2014/main" id="{577C07A0-BA59-40CF-89D7-3A52909539EE}"/>
-              </a:ext>
-            </a:extLst>
-          </p:cNvPr>
-          <p:cNvSpPr txBox="1"/>
-          <p:nvPr/>
-        </p:nvSpPr>
-        <p:spPr>
-          <a:xfrm>
-            <a:off x="6338853" y="4068348"/>
-            <a:ext cx="5688118" cy="646331"/>
-          </a:xfrm>
-          <a:prstGeom prst="rect">
-            <a:avLst/>
-          </a:prstGeom>
-          <a:noFill/>
-        </p:spPr>
-        <p:txBody>
-          <a:bodyPr wrap="square" rtlCol="0">
-            <a:spAutoFit/>
-          </a:bodyPr>
-          <a:lstStyle/>
-          <a:p>
-            <a:r>
-              <a:rPr lang="fr-CA" dirty="0">
-                <a:solidFill>
-                  <a:srgbClr val="B177BF"/>
-                </a:solidFill>
-              </a:rPr>
-              <a:t>• Dans le haut, un petit menu apparait. Il permet de contrôler l’exécution du code.</a:t>
-            </a:r>
-          </a:p>
-        </p:txBody>
-      </p:sp>
-      <p:pic>
-        <p:nvPicPr>
-          <p:cNvPr id="13" name="Image 12">
-            <a:extLst>
-              <a:ext uri="{FF2B5EF4-FFF2-40B4-BE49-F238E27FC236}">
-                <a16:creationId xmlns:a16="http://schemas.microsoft.com/office/drawing/2014/main" id="{BA939F6A-9295-4D7E-8FB5-CD193B18D7B2}"/>
-              </a:ext>
-            </a:extLst>
-          </p:cNvPr>
-          <p:cNvPicPr>
-            <a:picLocks noChangeAspect="1"/>
-          </p:cNvPicPr>
-          <p:nvPr/>
-        </p:nvPicPr>
-        <p:blipFill>
-          <a:blip r:embed="rId5"/>
-          <a:stretch>
-            <a:fillRect/>
-          </a:stretch>
-        </p:blipFill>
-        <p:spPr>
-          <a:xfrm>
-            <a:off x="7222389" y="4811621"/>
-            <a:ext cx="3258005" cy="781159"/>
-          </a:xfrm>
-          <a:prstGeom prst="rect">
-            <a:avLst/>
-          </a:prstGeom>
-          <a:ln w="28575">
-            <a:solidFill>
-              <a:srgbClr val="B177BF"/>
-            </a:solidFill>
-          </a:ln>
-        </p:spPr>
-      </p:pic>
-      <p:sp>
-        <p:nvSpPr>
-          <p:cNvPr id="14" name="ZoneTexte 13">
-            <a:extLst>
-              <a:ext uri="{FF2B5EF4-FFF2-40B4-BE49-F238E27FC236}">
-                <a16:creationId xmlns:a16="http://schemas.microsoft.com/office/drawing/2014/main" id="{2C8F0D3C-B999-4429-9E6B-50B63AA1CD80}"/>
-              </a:ext>
-            </a:extLst>
-          </p:cNvPr>
-          <p:cNvSpPr txBox="1"/>
-          <p:nvPr/>
-        </p:nvSpPr>
-        <p:spPr>
-          <a:xfrm>
-            <a:off x="9196251" y="5838930"/>
-            <a:ext cx="2913888" cy="523220"/>
-          </a:xfrm>
-          <a:prstGeom prst="rect">
-            <a:avLst/>
-          </a:prstGeom>
-          <a:noFill/>
-        </p:spPr>
-        <p:txBody>
-          <a:bodyPr wrap="square" rtlCol="0">
-            <a:spAutoFit/>
-          </a:bodyPr>
-          <a:lstStyle/>
-          <a:p>
-            <a:r>
-              <a:rPr lang="fr-CA" sz="1400" dirty="0">
-                <a:solidFill>
-                  <a:srgbClr val="B177BF"/>
-                </a:solidFill>
-              </a:rPr>
-              <a:t>Passer à la prochaine ligne qui sera exécutée </a:t>
-            </a:r>
-          </a:p>
-        </p:txBody>
-      </p:sp>
-      <p:sp>
-        <p:nvSpPr>
-          <p:cNvPr id="15" name="ZoneTexte 14">
-            <a:extLst>
-              <a:ext uri="{FF2B5EF4-FFF2-40B4-BE49-F238E27FC236}">
-                <a16:creationId xmlns:a16="http://schemas.microsoft.com/office/drawing/2014/main" id="{BF2C085D-8BE8-4258-8579-7199D7F16741}"/>
-              </a:ext>
-            </a:extLst>
-          </p:cNvPr>
-          <p:cNvSpPr txBox="1"/>
-          <p:nvPr/>
-        </p:nvSpPr>
-        <p:spPr>
-          <a:xfrm>
-            <a:off x="5693663" y="5815896"/>
-            <a:ext cx="2913888" cy="523220"/>
-          </a:xfrm>
-          <a:prstGeom prst="rect">
-            <a:avLst/>
-          </a:prstGeom>
-          <a:noFill/>
-        </p:spPr>
-        <p:txBody>
-          <a:bodyPr wrap="square" rtlCol="0">
-            <a:spAutoFit/>
-          </a:bodyPr>
-          <a:lstStyle/>
-          <a:p>
-            <a:r>
-              <a:rPr lang="fr-CA" sz="1400" dirty="0">
-                <a:solidFill>
-                  <a:srgbClr val="B177BF"/>
-                </a:solidFill>
-              </a:rPr>
-              <a:t>Poursuivre l’exécution normale du programme</a:t>
-            </a:r>
-          </a:p>
-        </p:txBody>
-      </p:sp>
-      <p:cxnSp>
-        <p:nvCxnSpPr>
-          <p:cNvPr id="16" name="Connecteur droit avec flèche 15">
-            <a:extLst>
-              <a:ext uri="{FF2B5EF4-FFF2-40B4-BE49-F238E27FC236}">
-                <a16:creationId xmlns:a16="http://schemas.microsoft.com/office/drawing/2014/main" id="{FE18F928-3FEE-4C73-ABC1-0052BE928E19}"/>
-              </a:ext>
-            </a:extLst>
-          </p:cNvPr>
-          <p:cNvCxnSpPr>
-            <a:cxnSpLocks/>
-          </p:cNvCxnSpPr>
-          <p:nvPr/>
-        </p:nvCxnSpPr>
-        <p:spPr>
-          <a:xfrm flipV="1">
-            <a:off x="7001015" y="5202200"/>
-            <a:ext cx="1082281" cy="616708"/>
-          </a:xfrm>
-          <a:prstGeom prst="straightConnector1">
-            <a:avLst/>
-          </a:prstGeom>
-          <a:ln w="57150">
-            <a:solidFill>
-              <a:srgbClr val="FA4098"/>
-            </a:solidFill>
-            <a:tailEnd type="triangle"/>
-          </a:ln>
-        </p:spPr>
-        <p:style>
-          <a:lnRef idx="1">
-            <a:schemeClr val="accent1"/>
-          </a:lnRef>
-          <a:fillRef idx="0">
-            <a:schemeClr val="accent1"/>
-          </a:fillRef>
-          <a:effectRef idx="0">
-            <a:schemeClr val="accent1"/>
-          </a:effectRef>
-          <a:fontRef idx="minor">
-            <a:schemeClr val="tx1"/>
-          </a:fontRef>
-        </p:style>
-      </p:cxnSp>
-      <p:cxnSp>
-        <p:nvCxnSpPr>
-          <p:cNvPr id="18" name="Connecteur droit avec flèche 17">
-            <a:extLst>
-              <a:ext uri="{FF2B5EF4-FFF2-40B4-BE49-F238E27FC236}">
-                <a16:creationId xmlns:a16="http://schemas.microsoft.com/office/drawing/2014/main" id="{BDD8FF7A-2A82-4690-8AAD-25CCE4379D68}"/>
-              </a:ext>
-            </a:extLst>
-          </p:cNvPr>
-          <p:cNvCxnSpPr>
-            <a:cxnSpLocks/>
-          </p:cNvCxnSpPr>
-          <p:nvPr/>
-        </p:nvCxnSpPr>
-        <p:spPr>
-          <a:xfrm flipH="1" flipV="1">
-            <a:off x="8624436" y="5284426"/>
-            <a:ext cx="605026" cy="632656"/>
-          </a:xfrm>
-          <a:prstGeom prst="straightConnector1">
-            <a:avLst/>
-          </a:prstGeom>
-          <a:ln w="57150">
-            <a:solidFill>
-              <a:srgbClr val="FA4098"/>
-            </a:solidFill>
-            <a:tailEnd type="triangle"/>
-          </a:ln>
-        </p:spPr>
-        <p:style>
-          <a:lnRef idx="1">
-            <a:schemeClr val="accent1"/>
-          </a:lnRef>
-          <a:fillRef idx="0">
-            <a:schemeClr val="accent1"/>
-          </a:fillRef>
-          <a:effectRef idx="0">
-            <a:schemeClr val="accent1"/>
-          </a:effectRef>
-          <a:fontRef idx="minor">
-            <a:schemeClr val="tx1"/>
-          </a:fontRef>
-        </p:style>
-      </p:cxnSp>
-      <p:sp>
-        <p:nvSpPr>
-          <p:cNvPr id="20" name="Rectangle 19">
-            <a:extLst>
-              <a:ext uri="{FF2B5EF4-FFF2-40B4-BE49-F238E27FC236}">
-                <a16:creationId xmlns:a16="http://schemas.microsoft.com/office/drawing/2014/main" id="{3D7253CD-3CDF-4DED-8C11-6BA970F3EE07}"/>
-              </a:ext>
-            </a:extLst>
-          </p:cNvPr>
-          <p:cNvSpPr/>
-          <p:nvPr/>
-        </p:nvSpPr>
-        <p:spPr>
-          <a:xfrm>
-            <a:off x="8034528" y="4998720"/>
-            <a:ext cx="310896" cy="285706"/>
-          </a:xfrm>
-          <a:prstGeom prst="rect">
-            <a:avLst/>
-          </a:prstGeom>
-          <a:noFill/>
-          <a:ln>
-            <a:solidFill>
-              <a:srgbClr val="FA4098"/>
-            </a:solidFill>
-            <a:prstDash val="dash"/>
-          </a:ln>
-        </p:spPr>
-        <p:style>
-          <a:lnRef idx="2">
-            <a:schemeClr val="accent1">
-              <a:shade val="50000"/>
-            </a:schemeClr>
-          </a:lnRef>
-          <a:fillRef idx="1">
-            <a:schemeClr val="accent1"/>
-          </a:fillRef>
-          <a:effectRef idx="0">
-            <a:schemeClr val="accent1"/>
-          </a:effectRef>
-          <a:fontRef idx="minor">
-            <a:schemeClr val="lt1"/>
-          </a:fontRef>
-        </p:style>
-        <p:txBody>
-          <a:bodyPr rtlCol="0" anchor="ctr"/>
-          <a:lstStyle/>
-          <a:p>
-            <a:pPr algn="ctr"/>
-            <a:endParaRPr lang="fr-CA" dirty="0"/>
-          </a:p>
-        </p:txBody>
-      </p:sp>
-      <p:sp>
-        <p:nvSpPr>
-          <p:cNvPr id="21" name="Rectangle 20">
-            <a:extLst>
-              <a:ext uri="{FF2B5EF4-FFF2-40B4-BE49-F238E27FC236}">
-                <a16:creationId xmlns:a16="http://schemas.microsoft.com/office/drawing/2014/main" id="{0941CCA8-1EB7-44D6-91AC-00CE5FC26970}"/>
-              </a:ext>
-            </a:extLst>
-          </p:cNvPr>
-          <p:cNvSpPr/>
-          <p:nvPr/>
-        </p:nvSpPr>
-        <p:spPr>
-          <a:xfrm>
-            <a:off x="8400288" y="4998720"/>
-            <a:ext cx="310896" cy="285706"/>
-          </a:xfrm>
-          <a:prstGeom prst="rect">
-            <a:avLst/>
-          </a:prstGeom>
-          <a:noFill/>
-          <a:ln>
-            <a:solidFill>
-              <a:srgbClr val="FA4098"/>
-            </a:solidFill>
-            <a:prstDash val="dash"/>
-          </a:ln>
-        </p:spPr>
-        <p:style>
-          <a:lnRef idx="2">
-            <a:schemeClr val="accent1">
-              <a:shade val="50000"/>
-            </a:schemeClr>
-          </a:lnRef>
-          <a:fillRef idx="1">
-            <a:schemeClr val="accent1"/>
-          </a:fillRef>
-          <a:effectRef idx="0">
-            <a:schemeClr val="accent1"/>
-          </a:effectRef>
-          <a:fontRef idx="minor">
-            <a:schemeClr val="lt1"/>
-          </a:fontRef>
-        </p:style>
-        <p:txBody>
-          <a:bodyPr rtlCol="0" anchor="ctr"/>
-          <a:lstStyle/>
-          <a:p>
-            <a:pPr algn="ctr"/>
-            <a:endParaRPr lang="fr-CA" dirty="0"/>
-          </a:p>
-        </p:txBody>
-      </p:sp>
-    </p:spTree>
-    <p:extLst>
-      <p:ext uri="{BB962C8B-B14F-4D97-AF65-F5344CB8AC3E}">
-        <p14:creationId xmlns:p14="http://schemas.microsoft.com/office/powerpoint/2010/main" val="3462662305"/>
-      </p:ext>
-    </p:extLst>
-  </p:cSld>
-  <p:clrMapOvr>
-    <a:masterClrMapping/>
-  </p:clrMapOvr>
-</p:sld>
-</file>
-
-<file path=ppt/slides/slide41.xml><?xml version="1.0" encoding="utf-8"?>
-<p:sld xmlns:a="http://schemas.openxmlformats.org/drawingml/2006/main" xmlns:r="http://schemas.openxmlformats.org/officeDocument/2006/relationships" xmlns:p="http://schemas.openxmlformats.org/presentationml/2006/main">
-  <p:cSld>
-    <p:spTree>
-      <p:nvGrpSpPr>
-        <p:cNvPr id="1" name=""/>
-        <p:cNvGrpSpPr/>
-        <p:nvPr/>
-      </p:nvGrpSpPr>
-      <p:grpSpPr>
-        <a:xfrm>
-          <a:off x="0" y="0"/>
-          <a:ext cx="0" cy="0"/>
-          <a:chOff x="0" y="0"/>
-          <a:chExt cx="0" cy="0"/>
-        </a:xfrm>
-      </p:grpSpPr>
-      <p:sp>
-        <p:nvSpPr>
-          <p:cNvPr id="2" name="Espace réservé du contenu 1">
-            <a:extLst>
-              <a:ext uri="{FF2B5EF4-FFF2-40B4-BE49-F238E27FC236}">
-                <a16:creationId xmlns:a16="http://schemas.microsoft.com/office/drawing/2014/main" id="{D175B3B4-CDD9-482F-AD6E-26EEB3AD0D65}"/>
-              </a:ext>
-            </a:extLst>
-          </p:cNvPr>
-          <p:cNvSpPr>
-            <a:spLocks noGrp="1"/>
-          </p:cNvSpPr>
-          <p:nvPr>
-            <p:ph idx="1"/>
-          </p:nvPr>
-        </p:nvSpPr>
-        <p:spPr/>
-        <p:txBody>
-          <a:bodyPr/>
-          <a:lstStyle/>
-          <a:p>
-            <a:r>
-              <a:rPr lang="fr-CA" dirty="0"/>
-              <a:t> Débogage avec VS Code</a:t>
-            </a:r>
-          </a:p>
-          <a:p>
-            <a:pPr lvl="1"/>
-            <a:r>
-              <a:rPr lang="fr-CA" dirty="0"/>
-              <a:t> </a:t>
-            </a:r>
-            <a:r>
-              <a:rPr lang="fr-CA" dirty="0">
-                <a:solidFill>
-                  <a:srgbClr val="FA4098"/>
-                </a:solidFill>
-              </a:rPr>
-              <a:t>Étape 6</a:t>
-            </a:r>
-            <a:r>
-              <a:rPr lang="fr-CA" dirty="0"/>
-              <a:t> : Trouver où ça tourne mal dans l’exécution du code</a:t>
-            </a:r>
-          </a:p>
-          <a:p>
-            <a:pPr lvl="1"/>
-            <a:endParaRPr lang="fr-CA" dirty="0"/>
-          </a:p>
-          <a:p>
-            <a:pPr lvl="1"/>
-            <a:endParaRPr lang="fr-CA" dirty="0"/>
-          </a:p>
-        </p:txBody>
-      </p:sp>
-      <p:sp>
-        <p:nvSpPr>
-          <p:cNvPr id="3" name="Titre 2">
-            <a:extLst>
-              <a:ext uri="{FF2B5EF4-FFF2-40B4-BE49-F238E27FC236}">
-                <a16:creationId xmlns:a16="http://schemas.microsoft.com/office/drawing/2014/main" id="{08626D7E-0E2B-41DD-A935-9F2BB87645EF}"/>
-              </a:ext>
-            </a:extLst>
-          </p:cNvPr>
-          <p:cNvSpPr>
-            <a:spLocks noGrp="1"/>
-          </p:cNvSpPr>
-          <p:nvPr>
-            <p:ph type="title"/>
-          </p:nvPr>
-        </p:nvSpPr>
-        <p:spPr/>
-        <p:txBody>
-          <a:bodyPr/>
-          <a:lstStyle/>
-          <a:p>
-            <a:r>
-              <a:rPr lang="fr-CA" dirty="0"/>
-              <a:t>Débogage avec VS Code</a:t>
-            </a:r>
-          </a:p>
-        </p:txBody>
-      </p:sp>
-      <p:pic>
-        <p:nvPicPr>
-          <p:cNvPr id="5" name="Image 4">
-            <a:extLst>
-              <a:ext uri="{FF2B5EF4-FFF2-40B4-BE49-F238E27FC236}">
-                <a16:creationId xmlns:a16="http://schemas.microsoft.com/office/drawing/2014/main" id="{43C86289-2892-43FB-8888-E25509DE7323}"/>
-              </a:ext>
-            </a:extLst>
-          </p:cNvPr>
-          <p:cNvPicPr>
-            <a:picLocks noChangeAspect="1"/>
-          </p:cNvPicPr>
-          <p:nvPr/>
-        </p:nvPicPr>
-        <p:blipFill>
-          <a:blip r:embed="rId2"/>
-          <a:stretch>
-            <a:fillRect/>
-          </a:stretch>
-        </p:blipFill>
-        <p:spPr>
-          <a:xfrm>
-            <a:off x="7635346" y="2145175"/>
-            <a:ext cx="3344325" cy="2859641"/>
-          </a:xfrm>
-          <a:prstGeom prst="rect">
-            <a:avLst/>
-          </a:prstGeom>
-          <a:ln w="28575">
-            <a:solidFill>
-              <a:srgbClr val="B177BF"/>
-            </a:solidFill>
-          </a:ln>
-        </p:spPr>
-      </p:pic>
-      <p:sp>
-        <p:nvSpPr>
-          <p:cNvPr id="6" name="ZoneTexte 5">
-            <a:extLst>
-              <a:ext uri="{FF2B5EF4-FFF2-40B4-BE49-F238E27FC236}">
-                <a16:creationId xmlns:a16="http://schemas.microsoft.com/office/drawing/2014/main" id="{C8C7C420-1DBB-40C8-92BA-55EA583089A6}"/>
-              </a:ext>
-            </a:extLst>
-          </p:cNvPr>
-          <p:cNvSpPr txBox="1"/>
-          <p:nvPr/>
-        </p:nvSpPr>
-        <p:spPr>
-          <a:xfrm>
-            <a:off x="1761744" y="3075439"/>
-            <a:ext cx="5053584" cy="923330"/>
-          </a:xfrm>
-          <a:prstGeom prst="rect">
-            <a:avLst/>
-          </a:prstGeom>
-          <a:noFill/>
-        </p:spPr>
-        <p:txBody>
-          <a:bodyPr wrap="square" rtlCol="0">
-            <a:spAutoFit/>
-          </a:bodyPr>
-          <a:lstStyle/>
-          <a:p>
-            <a:r>
-              <a:rPr lang="fr-CA" dirty="0">
-                <a:solidFill>
-                  <a:srgbClr val="B177BF"/>
-                </a:solidFill>
-              </a:rPr>
-              <a:t>• Pour le moment, on est arrêté sur la ligne du </a:t>
-            </a:r>
-            <a:r>
-              <a:rPr lang="fr-CA" b="1" dirty="0">
-                <a:solidFill>
-                  <a:srgbClr val="FA4098"/>
-                </a:solidFill>
-              </a:rPr>
-              <a:t>if</a:t>
-            </a:r>
-            <a:r>
-              <a:rPr lang="fr-CA" dirty="0">
-                <a:solidFill>
-                  <a:srgbClr val="B177BF"/>
-                </a:solidFill>
-              </a:rPr>
-              <a:t>. Comme on a vu, </a:t>
-            </a:r>
-            <a:r>
-              <a:rPr lang="fr-CA" b="1" dirty="0">
-                <a:latin typeface="Courier New" panose="02070309020205020404" pitchFamily="49" charset="0"/>
-                <a:cs typeface="Courier New" panose="02070309020205020404" pitchFamily="49" charset="0"/>
-              </a:rPr>
-              <a:t>gTemps</a:t>
-            </a:r>
-            <a:r>
-              <a:rPr lang="fr-CA" dirty="0">
-                <a:solidFill>
-                  <a:srgbClr val="B177BF"/>
-                </a:solidFill>
-              </a:rPr>
-              <a:t> vaut </a:t>
-            </a:r>
-            <a:r>
-              <a:rPr lang="fr-CA" dirty="0">
-                <a:solidFill>
-                  <a:srgbClr val="C00000"/>
-                </a:solidFill>
-              </a:rPr>
-              <a:t>"jour"</a:t>
-            </a:r>
-            <a:r>
-              <a:rPr lang="fr-CA" dirty="0">
-                <a:solidFill>
-                  <a:srgbClr val="B177BF"/>
-                </a:solidFill>
-              </a:rPr>
-              <a:t>. Nous allons voir ce qui se passe ensuite en appuyant sur </a:t>
-            </a:r>
-          </a:p>
-        </p:txBody>
-      </p:sp>
-      <p:pic>
-        <p:nvPicPr>
-          <p:cNvPr id="8" name="Image 7">
-            <a:extLst>
-              <a:ext uri="{FF2B5EF4-FFF2-40B4-BE49-F238E27FC236}">
-                <a16:creationId xmlns:a16="http://schemas.microsoft.com/office/drawing/2014/main" id="{C07CF9D4-0AB8-4333-AC85-CE6FB646C2E5}"/>
-              </a:ext>
-            </a:extLst>
-          </p:cNvPr>
-          <p:cNvPicPr>
-            <a:picLocks noChangeAspect="1"/>
-          </p:cNvPicPr>
-          <p:nvPr/>
-        </p:nvPicPr>
-        <p:blipFill>
-          <a:blip r:embed="rId3"/>
-          <a:stretch>
-            <a:fillRect/>
-          </a:stretch>
-        </p:blipFill>
-        <p:spPr>
-          <a:xfrm>
-            <a:off x="6031960" y="3682056"/>
-            <a:ext cx="328997" cy="260456"/>
-          </a:xfrm>
-          <a:prstGeom prst="rect">
-            <a:avLst/>
-          </a:prstGeom>
-        </p:spPr>
-      </p:pic>
-      <p:pic>
-        <p:nvPicPr>
-          <p:cNvPr id="10" name="Image 9">
-            <a:extLst>
-              <a:ext uri="{FF2B5EF4-FFF2-40B4-BE49-F238E27FC236}">
-                <a16:creationId xmlns:a16="http://schemas.microsoft.com/office/drawing/2014/main" id="{DD9EE2EE-BF3E-448D-807F-8EE9C10D5244}"/>
-              </a:ext>
-            </a:extLst>
-          </p:cNvPr>
-          <p:cNvPicPr>
-            <a:picLocks noChangeAspect="1"/>
-          </p:cNvPicPr>
-          <p:nvPr/>
-        </p:nvPicPr>
-        <p:blipFill>
-          <a:blip r:embed="rId4"/>
-          <a:stretch>
-            <a:fillRect/>
-          </a:stretch>
-        </p:blipFill>
-        <p:spPr>
-          <a:xfrm>
-            <a:off x="424352" y="4872634"/>
-            <a:ext cx="5136189" cy="1809242"/>
-          </a:xfrm>
-          <a:prstGeom prst="rect">
-            <a:avLst/>
-          </a:prstGeom>
-          <a:ln w="28575">
-            <a:solidFill>
-              <a:srgbClr val="B177BF"/>
-            </a:solidFill>
-          </a:ln>
-        </p:spPr>
-      </p:pic>
-      <p:sp>
-        <p:nvSpPr>
-          <p:cNvPr id="11" name="ZoneTexte 10">
-            <a:extLst>
-              <a:ext uri="{FF2B5EF4-FFF2-40B4-BE49-F238E27FC236}">
-                <a16:creationId xmlns:a16="http://schemas.microsoft.com/office/drawing/2014/main" id="{09F70D39-4A23-4C7C-A121-7AF32EC7186A}"/>
-              </a:ext>
-            </a:extLst>
-          </p:cNvPr>
-          <p:cNvSpPr txBox="1"/>
-          <p:nvPr/>
-        </p:nvSpPr>
-        <p:spPr>
-          <a:xfrm>
-            <a:off x="5839968" y="5184972"/>
-            <a:ext cx="5401056" cy="1477328"/>
-          </a:xfrm>
-          <a:prstGeom prst="rect">
-            <a:avLst/>
-          </a:prstGeom>
-          <a:noFill/>
-        </p:spPr>
-        <p:txBody>
-          <a:bodyPr wrap="square" rtlCol="0">
-            <a:spAutoFit/>
-          </a:bodyPr>
-          <a:lstStyle/>
-          <a:p>
-            <a:r>
-              <a:rPr lang="fr-CA" dirty="0">
-                <a:solidFill>
-                  <a:srgbClr val="B177BF"/>
-                </a:solidFill>
-              </a:rPr>
-              <a:t>On remarque deux choses :</a:t>
-            </a:r>
-          </a:p>
-          <a:p>
-            <a:r>
-              <a:rPr lang="fr-CA" dirty="0">
-                <a:solidFill>
-                  <a:srgbClr val="B177BF"/>
-                </a:solidFill>
-              </a:rPr>
-              <a:t>1 - </a:t>
-            </a:r>
-            <a:r>
-              <a:rPr lang="fr-CA" b="1" dirty="0">
-                <a:latin typeface="Courier New" panose="02070309020205020404" pitchFamily="49" charset="0"/>
-                <a:cs typeface="Courier New" panose="02070309020205020404" pitchFamily="49" charset="0"/>
-              </a:rPr>
-              <a:t>gTemps</a:t>
-            </a:r>
-            <a:r>
-              <a:rPr lang="fr-CA" dirty="0">
-                <a:solidFill>
-                  <a:srgbClr val="B177BF"/>
-                </a:solidFill>
-              </a:rPr>
-              <a:t> vaut maintenant </a:t>
-            </a:r>
-            <a:r>
-              <a:rPr lang="fr-CA" dirty="0">
-                <a:solidFill>
-                  <a:srgbClr val="C00000"/>
-                </a:solidFill>
-              </a:rPr>
-              <a:t>"soir"</a:t>
-            </a:r>
-            <a:r>
-              <a:rPr lang="fr-CA" dirty="0">
-                <a:solidFill>
-                  <a:srgbClr val="B177BF"/>
-                </a:solidFill>
-              </a:rPr>
-              <a:t>, alors que nous ne souhaitions pas changer sa valeur.</a:t>
-            </a:r>
-          </a:p>
-          <a:p>
-            <a:r>
-              <a:rPr lang="fr-CA" dirty="0">
-                <a:solidFill>
-                  <a:srgbClr val="B177BF"/>
-                </a:solidFill>
-              </a:rPr>
-              <a:t>2 - On exécute le bloc du </a:t>
-            </a:r>
-            <a:r>
-              <a:rPr lang="fr-CA" b="1" dirty="0">
-                <a:solidFill>
-                  <a:srgbClr val="FA4098"/>
-                </a:solidFill>
-              </a:rPr>
-              <a:t>if</a:t>
-            </a:r>
-            <a:r>
-              <a:rPr lang="fr-CA" dirty="0">
-                <a:solidFill>
-                  <a:srgbClr val="B177BF"/>
-                </a:solidFill>
-              </a:rPr>
-              <a:t>, alors que la condition nous semblait </a:t>
-            </a:r>
-            <a:r>
-              <a:rPr lang="fr-CA" dirty="0"/>
-              <a:t>false</a:t>
-            </a:r>
-            <a:r>
-              <a:rPr lang="fr-CA" dirty="0">
-                <a:solidFill>
-                  <a:srgbClr val="B177BF"/>
-                </a:solidFill>
-              </a:rPr>
-              <a:t> ! </a:t>
-            </a:r>
-          </a:p>
-        </p:txBody>
-      </p:sp>
-    </p:spTree>
-    <p:extLst>
-      <p:ext uri="{BB962C8B-B14F-4D97-AF65-F5344CB8AC3E}">
-        <p14:creationId xmlns:p14="http://schemas.microsoft.com/office/powerpoint/2010/main" val="3483004852"/>
-      </p:ext>
-    </p:extLst>
-  </p:cSld>
-  <p:clrMapOvr>
-    <a:masterClrMapping/>
-  </p:clrMapOvr>
-</p:sld>
-</file>
-
-<file path=ppt/slides/slide42.xml><?xml version="1.0" encoding="utf-8"?>
-<p:sld xmlns:a="http://schemas.openxmlformats.org/drawingml/2006/main" xmlns:r="http://schemas.openxmlformats.org/officeDocument/2006/relationships" xmlns:p="http://schemas.openxmlformats.org/presentationml/2006/main">
-  <p:cSld>
-    <p:spTree>
-      <p:nvGrpSpPr>
-        <p:cNvPr id="1" name=""/>
-        <p:cNvGrpSpPr/>
-        <p:nvPr/>
-      </p:nvGrpSpPr>
-      <p:grpSpPr>
-        <a:xfrm>
-          <a:off x="0" y="0"/>
-          <a:ext cx="0" cy="0"/>
-          <a:chOff x="0" y="0"/>
-          <a:chExt cx="0" cy="0"/>
-        </a:xfrm>
-      </p:grpSpPr>
-      <p:sp>
-        <p:nvSpPr>
-          <p:cNvPr id="2" name="Espace réservé du contenu 1">
-            <a:extLst>
-              <a:ext uri="{FF2B5EF4-FFF2-40B4-BE49-F238E27FC236}">
-                <a16:creationId xmlns:a16="http://schemas.microsoft.com/office/drawing/2014/main" id="{D175B3B4-CDD9-482F-AD6E-26EEB3AD0D65}"/>
-              </a:ext>
-            </a:extLst>
-          </p:cNvPr>
-          <p:cNvSpPr>
-            <a:spLocks noGrp="1"/>
-          </p:cNvSpPr>
-          <p:nvPr>
-            <p:ph idx="1"/>
-          </p:nvPr>
-        </p:nvSpPr>
-        <p:spPr>
-          <a:xfrm>
-            <a:off x="838200" y="1150572"/>
-            <a:ext cx="10512000" cy="5562048"/>
-          </a:xfrm>
-        </p:spPr>
-        <p:txBody>
-          <a:bodyPr/>
-          <a:lstStyle/>
-          <a:p>
-            <a:r>
-              <a:rPr lang="fr-CA" dirty="0"/>
-              <a:t> Débogage avec VS Code</a:t>
-            </a:r>
-          </a:p>
-          <a:p>
-            <a:pPr lvl="1"/>
-            <a:r>
-              <a:rPr lang="fr-CA" dirty="0"/>
-              <a:t> </a:t>
-            </a:r>
-            <a:r>
-              <a:rPr lang="fr-CA" dirty="0">
-                <a:solidFill>
-                  <a:srgbClr val="FA4098"/>
-                </a:solidFill>
-              </a:rPr>
-              <a:t>Étape 7</a:t>
-            </a:r>
-            <a:r>
-              <a:rPr lang="fr-CA" dirty="0"/>
-              <a:t> : Corriger le bogue</a:t>
-            </a:r>
-          </a:p>
-          <a:p>
-            <a:pPr lvl="2"/>
-            <a:r>
-              <a:rPr lang="fr-CA" dirty="0"/>
-              <a:t> Dans ce cas-ci, on a constaté que le </a:t>
-            </a:r>
-            <a:r>
-              <a:rPr lang="fr-CA" b="1" dirty="0">
-                <a:solidFill>
-                  <a:srgbClr val="FA4098"/>
-                </a:solidFill>
-              </a:rPr>
-              <a:t>if</a:t>
-            </a:r>
-            <a:r>
-              <a:rPr lang="fr-CA" dirty="0"/>
-              <a:t> n’avait pas le comportement souhaité.</a:t>
-            </a:r>
-          </a:p>
-          <a:p>
-            <a:pPr lvl="3"/>
-            <a:r>
-              <a:rPr lang="fr-CA" dirty="0"/>
-              <a:t> Sa condition a été </a:t>
-            </a:r>
-            <a:r>
-              <a:rPr lang="fr-CA"/>
-              <a:t>évaluée </a:t>
-            </a:r>
-            <a:r>
-              <a:rPr lang="fr-CA">
-                <a:solidFill>
-                  <a:schemeClr val="tx1"/>
-                </a:solidFill>
-              </a:rPr>
-              <a:t>true</a:t>
-            </a:r>
-            <a:r>
-              <a:rPr lang="fr-CA"/>
-              <a:t> </a:t>
-            </a:r>
-            <a:r>
-              <a:rPr lang="fr-CA" dirty="0"/>
-              <a:t>alors que gTemps vaut </a:t>
-            </a:r>
-            <a:r>
-              <a:rPr lang="fr-CA" dirty="0">
-                <a:solidFill>
-                  <a:srgbClr val="C00000"/>
-                </a:solidFill>
-              </a:rPr>
-              <a:t>"jour"</a:t>
-            </a:r>
-            <a:r>
-              <a:rPr lang="fr-CA" dirty="0"/>
-              <a:t>.</a:t>
-            </a:r>
-          </a:p>
-          <a:p>
-            <a:pPr lvl="3"/>
-            <a:r>
-              <a:rPr lang="fr-CA" dirty="0"/>
-              <a:t> Suite à son exécution, </a:t>
-            </a:r>
-            <a:r>
-              <a:rPr lang="fr-CA" b="1" dirty="0">
-                <a:solidFill>
-                  <a:schemeClr val="tx1"/>
-                </a:solidFill>
-                <a:latin typeface="Courier New" panose="02070309020205020404" pitchFamily="49" charset="0"/>
-                <a:cs typeface="Courier New" panose="02070309020205020404" pitchFamily="49" charset="0"/>
-              </a:rPr>
-              <a:t>gTemps</a:t>
-            </a:r>
-            <a:r>
-              <a:rPr lang="fr-CA" dirty="0"/>
-              <a:t> valait </a:t>
-            </a:r>
-            <a:r>
-              <a:rPr lang="fr-CA" dirty="0">
-                <a:solidFill>
-                  <a:srgbClr val="C00000"/>
-                </a:solidFill>
-              </a:rPr>
-              <a:t>"soir"</a:t>
-            </a:r>
-            <a:r>
-              <a:rPr lang="fr-CA" dirty="0"/>
-              <a:t>.</a:t>
-            </a:r>
-          </a:p>
-          <a:p>
-            <a:pPr lvl="3"/>
-            <a:endParaRPr lang="fr-CA" dirty="0"/>
-          </a:p>
-          <a:p>
-            <a:pPr lvl="2"/>
-            <a:r>
-              <a:rPr lang="fr-CA" dirty="0"/>
-              <a:t> Si on n’arrive pas à trouver comment corriger le problème à ce stade, on peut fouiller...</a:t>
-            </a:r>
-          </a:p>
-          <a:p>
-            <a:pPr lvl="3"/>
-            <a:r>
-              <a:rPr lang="fr-CA" dirty="0"/>
-              <a:t> Dans les notes de cours (Y a-t-il des exemples similaires de if ?)</a:t>
-            </a:r>
-          </a:p>
-          <a:p>
-            <a:pPr lvl="3"/>
-            <a:r>
-              <a:rPr lang="fr-CA" dirty="0"/>
-              <a:t> Dans l’aide mémoire (Que fait l’opérateur </a:t>
-            </a:r>
-            <a:r>
-              <a:rPr lang="fr-CA" dirty="0">
-                <a:solidFill>
-                  <a:srgbClr val="FA4098"/>
-                </a:solidFill>
-              </a:rPr>
-              <a:t>=</a:t>
-            </a:r>
-            <a:r>
-              <a:rPr lang="fr-CA" dirty="0"/>
-              <a:t> ? À quoi devrait ressembler une chaîne de caractère ? </a:t>
-            </a:r>
-            <a:r>
-              <a:rPr lang="fr-CA" b="1" dirty="0">
-                <a:solidFill>
-                  <a:schemeClr val="tx1"/>
-                </a:solidFill>
-                <a:latin typeface="Courier New" panose="02070309020205020404" pitchFamily="49" charset="0"/>
-                <a:cs typeface="Courier New" panose="02070309020205020404" pitchFamily="49" charset="0"/>
-              </a:rPr>
-              <a:t>gTemps</a:t>
-            </a:r>
-            <a:r>
-              <a:rPr lang="fr-CA" dirty="0"/>
-              <a:t> est-il bien déclaré ?)</a:t>
-            </a:r>
-          </a:p>
-          <a:p>
-            <a:pPr lvl="3"/>
-            <a:r>
-              <a:rPr lang="fr-CA" dirty="0"/>
-              <a:t> Demander à l’enseignant </a:t>
-            </a:r>
-            <a:r>
-              <a:rPr lang="en-CA" dirty="0"/>
-              <a:t>👩‍🏫👨‍🏫</a:t>
-            </a:r>
-            <a:endParaRPr lang="fr-CA" dirty="0"/>
-          </a:p>
-          <a:p>
-            <a:pPr lvl="3"/>
-            <a:r>
-              <a:rPr lang="fr-CA" dirty="0"/>
-              <a:t> Chercher sur internet </a:t>
-            </a:r>
-            <a:r>
-              <a:rPr lang="en-CA" dirty="0"/>
-              <a:t>🌐</a:t>
-            </a:r>
-            <a:r>
-              <a:rPr lang="fr-CA" dirty="0"/>
-              <a:t> (Parfois efficace, parfois moins...)</a:t>
-            </a:r>
-          </a:p>
-          <a:p>
-            <a:pPr lvl="1"/>
-            <a:endParaRPr lang="fr-CA" dirty="0"/>
-          </a:p>
-          <a:p>
-            <a:pPr lvl="2"/>
-            <a:r>
-              <a:rPr lang="fr-CA" dirty="0"/>
-              <a:t> Dans ce cas-ci, la solution :</a:t>
-            </a:r>
-          </a:p>
-          <a:p>
-            <a:pPr lvl="3"/>
-            <a:r>
-              <a:rPr lang="fr-CA" dirty="0"/>
-              <a:t> Remplacer </a:t>
-            </a:r>
-            <a:r>
-              <a:rPr lang="fr-CA" b="1" dirty="0">
-                <a:solidFill>
-                  <a:schemeClr val="tx1"/>
-                </a:solidFill>
-                <a:cs typeface="Courier New" panose="02070309020205020404" pitchFamily="49" charset="0"/>
-              </a:rPr>
-              <a:t>=</a:t>
-            </a:r>
-            <a:r>
-              <a:rPr lang="fr-CA" dirty="0"/>
-              <a:t> par </a:t>
-            </a:r>
-            <a:r>
-              <a:rPr lang="fr-CA" b="1" dirty="0">
-                <a:solidFill>
-                  <a:schemeClr val="tx1"/>
-                </a:solidFill>
-                <a:cs typeface="Courier New" panose="02070309020205020404" pitchFamily="49" charset="0"/>
-              </a:rPr>
-              <a:t>==</a:t>
-            </a:r>
-            <a:r>
-              <a:rPr lang="fr-CA" dirty="0"/>
-              <a:t>. Pour rappel, </a:t>
-            </a:r>
-            <a:r>
-              <a:rPr lang="fr-CA" b="1" dirty="0">
-                <a:solidFill>
-                  <a:schemeClr val="tx1"/>
-                </a:solidFill>
-                <a:cs typeface="Courier New" panose="02070309020205020404" pitchFamily="49" charset="0"/>
-              </a:rPr>
-              <a:t>==</a:t>
-            </a:r>
-            <a:r>
-              <a:rPr lang="fr-CA" dirty="0"/>
-              <a:t> sert à comparer deux valeurs,</a:t>
-            </a:r>
-          </a:p>
-          <a:p>
-            <a:pPr marL="1371600" lvl="3" indent="0">
-              <a:buNone/>
-            </a:pPr>
-            <a:r>
-              <a:rPr lang="fr-CA" dirty="0"/>
-              <a:t>      alors que </a:t>
-            </a:r>
-            <a:r>
-              <a:rPr lang="fr-CA" b="1" dirty="0">
-                <a:solidFill>
-                  <a:schemeClr val="tx1"/>
-                </a:solidFill>
-                <a:cs typeface="Courier New" panose="02070309020205020404" pitchFamily="49" charset="0"/>
-              </a:rPr>
-              <a:t>=</a:t>
-            </a:r>
-            <a:r>
-              <a:rPr lang="fr-CA" dirty="0"/>
-              <a:t> sert à affecter une valeur à une variable.</a:t>
-            </a:r>
-          </a:p>
-          <a:p>
-            <a:pPr lvl="1"/>
-            <a:endParaRPr lang="fr-CA" dirty="0"/>
-          </a:p>
-        </p:txBody>
-      </p:sp>
-      <p:sp>
-        <p:nvSpPr>
-          <p:cNvPr id="3" name="Titre 2">
-            <a:extLst>
-              <a:ext uri="{FF2B5EF4-FFF2-40B4-BE49-F238E27FC236}">
-                <a16:creationId xmlns:a16="http://schemas.microsoft.com/office/drawing/2014/main" id="{08626D7E-0E2B-41DD-A935-9F2BB87645EF}"/>
-              </a:ext>
-            </a:extLst>
-          </p:cNvPr>
-          <p:cNvSpPr>
-            <a:spLocks noGrp="1"/>
-          </p:cNvSpPr>
-          <p:nvPr>
-            <p:ph type="title"/>
-          </p:nvPr>
-        </p:nvSpPr>
-        <p:spPr/>
-        <p:txBody>
-          <a:bodyPr/>
-          <a:lstStyle/>
-          <a:p>
-            <a:r>
-              <a:rPr lang="fr-CA" dirty="0"/>
-              <a:t>Débogage avec VS Code</a:t>
-            </a:r>
-          </a:p>
-        </p:txBody>
-      </p:sp>
-      <p:pic>
-        <p:nvPicPr>
-          <p:cNvPr id="5" name="Image 4">
-            <a:extLst>
-              <a:ext uri="{FF2B5EF4-FFF2-40B4-BE49-F238E27FC236}">
-                <a16:creationId xmlns:a16="http://schemas.microsoft.com/office/drawing/2014/main" id="{AA1F8069-DFCA-4D10-B0FE-16224642BCF2}"/>
-              </a:ext>
-            </a:extLst>
-          </p:cNvPr>
-          <p:cNvPicPr>
-            <a:picLocks noChangeAspect="1"/>
-          </p:cNvPicPr>
-          <p:nvPr/>
-        </p:nvPicPr>
-        <p:blipFill>
-          <a:blip r:embed="rId2"/>
-          <a:stretch>
-            <a:fillRect/>
-          </a:stretch>
-        </p:blipFill>
-        <p:spPr>
-          <a:xfrm>
-            <a:off x="8973667" y="4388196"/>
-            <a:ext cx="3096057" cy="2324424"/>
-          </a:xfrm>
-          <a:prstGeom prst="rect">
-            <a:avLst/>
-          </a:prstGeom>
-          <a:ln w="28575">
-            <a:solidFill>
-              <a:srgbClr val="B177BF"/>
-            </a:solidFill>
-          </a:ln>
-        </p:spPr>
-      </p:pic>
-    </p:spTree>
-    <p:extLst>
-      <p:ext uri="{BB962C8B-B14F-4D97-AF65-F5344CB8AC3E}">
-        <p14:creationId xmlns:p14="http://schemas.microsoft.com/office/powerpoint/2010/main" val="424874205"/>
       </p:ext>
     </p:extLst>
   </p:cSld>
@@ -21071,13 +17852,13 @@
 </file>
 
 <file path=customXml/itemProps1.xml><?xml version="1.0" encoding="utf-8"?>
-<ds:datastoreItem xmlns:ds="http://schemas.openxmlformats.org/officeDocument/2006/customXml" ds:itemID="{CD9420AE-D2BF-4345-8CD8-8C9690754707}"/>
+<ds:datastoreItem xmlns:ds="http://schemas.openxmlformats.org/officeDocument/2006/customXml" ds:itemID="{26BCF3A1-18F9-4237-A62C-FE8FD729A59B}"/>
 </file>
 
 <file path=customXml/itemProps2.xml><?xml version="1.0" encoding="utf-8"?>
-<ds:datastoreItem xmlns:ds="http://schemas.openxmlformats.org/officeDocument/2006/customXml" ds:itemID="{68662B50-99E5-47CF-B9B5-E98FB48BC6DD}"/>
+<ds:datastoreItem xmlns:ds="http://schemas.openxmlformats.org/officeDocument/2006/customXml" ds:itemID="{B78FD7E7-6B84-4EE5-90E9-BB011B3CB9AA}"/>
 </file>
 
 <file path=customXml/itemProps3.xml><?xml version="1.0" encoding="utf-8"?>
-<ds:datastoreItem xmlns:ds="http://schemas.openxmlformats.org/officeDocument/2006/customXml" ds:itemID="{2D7BE085-DD43-4A44-8813-D8B468F1582D}"/>
+<ds:datastoreItem xmlns:ds="http://schemas.openxmlformats.org/officeDocument/2006/customXml" ds:itemID="{96990211-9DD1-43E8-A779-D508E3AFE7B7}"/>
 </file>
--- a/semaine_04/420905_semaine4.pptx
+++ b/semaine_04/420905_semaine4.pptx
@@ -1832,7 +1832,7 @@
           <a:p>
             <a:fld id="{CFA36C02-C10D-4F70-ADA5-0F3523AD6F2E}" type="datetimeFigureOut">
               <a:rPr lang="fr-CA" smtClean="0"/>
-              <a:t>2022-09-10</a:t>
+              <a:t>2022-09-13</a:t>
             </a:fld>
             <a:endParaRPr lang="fr-CA" dirty="0"/>
           </a:p>
@@ -7539,18 +7539,34 @@
                   <a:srgbClr val="9073D1"/>
                 </a:solidFill>
               </a:rPr>
-              <a:t> dans l’élément avec l’id </a:t>
-            </a:r>
-            <a:r>
-              <a:rPr lang="fr-CA" dirty="0">
+              <a:t> dans l’élément avec </a:t>
+            </a:r>
+            <a:r>
+              <a:rPr lang="fr-CA" dirty="0" err="1">
+                <a:solidFill>
+                  <a:srgbClr val="9073D1"/>
+                </a:solidFill>
+              </a:rPr>
+              <a:t>l’id</a:t>
+            </a:r>
+            <a:r>
+              <a:rPr lang="fr-CA">
+                <a:solidFill>
+                  <a:srgbClr val="9073D1"/>
+                </a:solidFill>
+              </a:rPr>
+              <a:t> </a:t>
+            </a:r>
+            <a:r>
+              <a:rPr lang="fr-CA">
                 <a:solidFill>
                   <a:srgbClr val="FA4098"/>
                 </a:solidFill>
               </a:rPr>
-              <a:t>#personne</a:t>
-            </a:r>
-            <a:r>
-              <a:rPr lang="fr-CA" dirty="0">
+              <a:t>#statut</a:t>
+            </a:r>
+            <a:r>
+              <a:rPr lang="fr-CA">
                 <a:solidFill>
                   <a:srgbClr val="9073D1"/>
                 </a:solidFill>
@@ -8730,7 +8746,7 @@
                   <a:srgbClr val="9073D1"/>
                 </a:solidFill>
               </a:rPr>
-              <a:t>Si tu m’aides à déménager, je te paye une pizza. Sinon, nous ne seront plus amis. Dans ce cas, le fait d’aider ET de ne pas aider ont tous les deux une conséquence.</a:t>
+              <a:t>Si tu m’aides à déménager, je te paye une pizza. Sinon, nous ne serons plus amis. Dans ce cas, le fait d’aider ET de ne pas aider ont tous les deux une conséquence.</a:t>
             </a:r>
             <a:endParaRPr lang="fr-CA" dirty="0">
               <a:solidFill>
@@ -17659,8 +17675,8 @@
 </file>
 
 <file path=customXml/item1.xml><?xml version="1.0" encoding="utf-8"?>
-<ct:contentTypeSchema xmlns:ct="http://schemas.microsoft.com/office/2006/metadata/contentType" xmlns:ma="http://schemas.microsoft.com/office/2006/metadata/properties/metaAttributes" ct:_="" ma:_="" ma:contentTypeName="Document" ma:contentTypeID="0x01010062E8CCA7FB9EAE4D9797B5C1381037FC" ma:contentTypeVersion="9" ma:contentTypeDescription="Create a new document." ma:contentTypeScope="" ma:versionID="020e06b287671e86e91b3e1b12ab4816">
-  <xsd:schema xmlns:xsd="http://www.w3.org/2001/XMLSchema" xmlns:xs="http://www.w3.org/2001/XMLSchema" xmlns:p="http://schemas.microsoft.com/office/2006/metadata/properties" xmlns:ns2="83ab252c-4429-4d3c-b354-a26bac7f17c4" targetNamespace="http://schemas.microsoft.com/office/2006/metadata/properties" ma:root="true" ma:fieldsID="a7531f0ded98428dc5aa0cd72d251711" ns2:_="">
+<ct:contentTypeSchema xmlns:ct="http://schemas.microsoft.com/office/2006/metadata/contentType" xmlns:ma="http://schemas.microsoft.com/office/2006/metadata/properties/metaAttributes" ct:_="" ma:_="" ma:contentTypeName="Document" ma:contentTypeID="0x01010062E8CCA7FB9EAE4D9797B5C1381037FC" ma:contentTypeVersion="9" ma:contentTypeDescription="Crée un document." ma:contentTypeScope="" ma:versionID="170f9b33eac2855c0b5de9b58dbff08d">
+  <xsd:schema xmlns:xsd="http://www.w3.org/2001/XMLSchema" xmlns:xs="http://www.w3.org/2001/XMLSchema" xmlns:p="http://schemas.microsoft.com/office/2006/metadata/properties" xmlns:ns2="83ab252c-4429-4d3c-b354-a26bac7f17c4" targetNamespace="http://schemas.microsoft.com/office/2006/metadata/properties" ma:root="true" ma:fieldsID="9e0ae16a17618a4c9950a6915987a08e" ns2:_="">
     <xsd:import namespace="83ab252c-4429-4d3c-b354-a26bac7f17c4"/>
     <xsd:element name="properties">
       <xsd:complexType>
@@ -17746,8 +17762,8 @@
         <xsd:element ref="dc:creator" minOccurs="0" maxOccurs="1"/>
         <xsd:element ref="dcterms:created" minOccurs="0" maxOccurs="1"/>
         <xsd:element ref="dc:identifier" minOccurs="0" maxOccurs="1"/>
-        <xsd:element name="contentType" minOccurs="0" maxOccurs="1" type="xsd:string" ma:index="0" ma:displayName="Content Type"/>
-        <xsd:element ref="dc:title" minOccurs="0" maxOccurs="1" ma:index="4" ma:displayName="Title"/>
+        <xsd:element name="contentType" minOccurs="0" maxOccurs="1" type="xsd:string" ma:index="0" ma:displayName="Type de contenu"/>
+        <xsd:element ref="dc:title" minOccurs="0" maxOccurs="1" ma:index="4" ma:displayName="Titre"/>
         <xsd:element ref="dc:subject" minOccurs="0" maxOccurs="1"/>
         <xsd:element ref="dc:description" minOccurs="0" maxOccurs="1"/>
         <xsd:element name="keywords" minOccurs="0" maxOccurs="1" type="xsd:string"/>
@@ -17852,13 +17868,13 @@
 </file>
 
 <file path=customXml/itemProps1.xml><?xml version="1.0" encoding="utf-8"?>
-<ds:datastoreItem xmlns:ds="http://schemas.openxmlformats.org/officeDocument/2006/customXml" ds:itemID="{26BCF3A1-18F9-4237-A62C-FE8FD729A59B}"/>
+<ds:datastoreItem xmlns:ds="http://schemas.openxmlformats.org/officeDocument/2006/customXml" ds:itemID="{79F153A0-CDDC-456B-87EE-80CCA80E7156}"/>
 </file>
 
 <file path=customXml/itemProps2.xml><?xml version="1.0" encoding="utf-8"?>
-<ds:datastoreItem xmlns:ds="http://schemas.openxmlformats.org/officeDocument/2006/customXml" ds:itemID="{B78FD7E7-6B84-4EE5-90E9-BB011B3CB9AA}"/>
+<ds:datastoreItem xmlns:ds="http://schemas.openxmlformats.org/officeDocument/2006/customXml" ds:itemID="{8BA5E8ED-7A9F-4CFF-AED4-B7D11A30D94D}"/>
 </file>
 
 <file path=customXml/itemProps3.xml><?xml version="1.0" encoding="utf-8"?>
-<ds:datastoreItem xmlns:ds="http://schemas.openxmlformats.org/officeDocument/2006/customXml" ds:itemID="{96990211-9DD1-43E8-A779-D508E3AFE7B7}"/>
+<ds:datastoreItem xmlns:ds="http://schemas.openxmlformats.org/officeDocument/2006/customXml" ds:itemID="{D54D9912-8609-4729-A8BC-7DA5962B75BD}"/>
 </file>